--- a/2026_М_ПІ_ІПЗм_24_3_Правосуд_О_О.pptx
+++ b/2026_М_ПІ_ІПЗм_24_3_Правосуд_О_О.pptx
@@ -13,8 +13,8 @@
     <p:sldId id="259" r:id="rId4"/>
     <p:sldId id="260" r:id="rId5"/>
     <p:sldId id="261" r:id="rId6"/>
-    <p:sldId id="262" r:id="rId7"/>
-    <p:sldId id="263" r:id="rId8"/>
+    <p:sldId id="263" r:id="rId7"/>
+    <p:sldId id="262" r:id="rId8"/>
     <p:sldId id="264" r:id="rId9"/>
     <p:sldId id="265" r:id="rId10"/>
     <p:sldId id="268" r:id="rId11"/>
@@ -310,6 +310,259 @@
   <c:chart>
     <c:autoTitleDeleted val="1"/>
     <c:plotArea>
+      <c:layout/>
+      <c:barChart>
+        <c:barDir val="bar"/>
+        <c:grouping val="clustered"/>
+        <c:varyColors val="0"/>
+        <c:ser>
+          <c:idx val="0"/>
+          <c:order val="0"/>
+          <c:tx>
+            <c:strRef>
+              <c:f>Sheet1!$B$1</c:f>
+              <c:strCache>
+                <c:ptCount val="1"/>
+                <c:pt idx="0">
+                  <c:v>Series 1</c:v>
+                </c:pt>
+              </c:strCache>
+            </c:strRef>
+          </c:tx>
+          <c:spPr>
+            <a:solidFill>
+              <a:schemeClr val="accent1"/>
+            </a:solidFill>
+            <a:ln>
+              <a:noFill/>
+            </a:ln>
+            <a:effectLst/>
+          </c:spPr>
+          <c:invertIfNegative val="0"/>
+          <c:cat>
+            <c:strRef>
+              <c:f>Sheet1!$A$2:$A$6</c:f>
+              <c:strCache>
+                <c:ptCount val="5"/>
+                <c:pt idx="0">
+                  <c:v>Voxel+A*</c:v>
+                </c:pt>
+                <c:pt idx="1">
+                  <c:v>RRT</c:v>
+                </c:pt>
+                <c:pt idx="2">
+                  <c:v>NavMesh</c:v>
+                </c:pt>
+                <c:pt idx="3">
+                  <c:v>RL</c:v>
+                </c:pt>
+                <c:pt idx="4">
+                  <c:v>LLM + A*</c:v>
+                </c:pt>
+              </c:strCache>
+            </c:strRef>
+          </c:cat>
+          <c:val>
+            <c:numRef>
+              <c:f>Sheet1!$B$2:$B$6</c:f>
+              <c:numCache>
+                <c:formatCode>General</c:formatCode>
+                <c:ptCount val="5"/>
+                <c:pt idx="0">
+                  <c:v>0.76800000000000002</c:v>
+                </c:pt>
+                <c:pt idx="1">
+                  <c:v>0.65900000000000003</c:v>
+                </c:pt>
+                <c:pt idx="2">
+                  <c:v>0.624</c:v>
+                </c:pt>
+                <c:pt idx="3">
+                  <c:v>0.61899999999999999</c:v>
+                </c:pt>
+                <c:pt idx="4">
+                  <c:v>0.36549999999999999</c:v>
+                </c:pt>
+              </c:numCache>
+            </c:numRef>
+          </c:val>
+          <c:extLst>
+            <c:ext xmlns:c16="http://schemas.microsoft.com/office/drawing/2014/chart" uri="{C3380CC4-5D6E-409C-BE32-E72D297353CC}">
+              <c16:uniqueId val="{00000000-BE56-441F-BC4B-6775BE8C98F6}"/>
+            </c:ext>
+          </c:extLst>
+        </c:ser>
+        <c:dLbls>
+          <c:showLegendKey val="0"/>
+          <c:showVal val="0"/>
+          <c:showCatName val="0"/>
+          <c:showSerName val="0"/>
+          <c:showPercent val="0"/>
+          <c:showBubbleSize val="0"/>
+        </c:dLbls>
+        <c:gapWidth val="182"/>
+        <c:axId val="884920319"/>
+        <c:axId val="884922719"/>
+      </c:barChart>
+      <c:catAx>
+        <c:axId val="884920319"/>
+        <c:scaling>
+          <c:orientation val="minMax"/>
+        </c:scaling>
+        <c:delete val="0"/>
+        <c:axPos val="l"/>
+        <c:numFmt formatCode="General" sourceLinked="1"/>
+        <c:majorTickMark val="none"/>
+        <c:minorTickMark val="none"/>
+        <c:tickLblPos val="nextTo"/>
+        <c:spPr>
+          <a:noFill/>
+          <a:ln w="9525" cap="flat" cmpd="sng" algn="ctr">
+            <a:solidFill>
+              <a:schemeClr val="tx1">
+                <a:lumMod val="15000"/>
+                <a:lumOff val="85000"/>
+              </a:schemeClr>
+            </a:solidFill>
+            <a:round/>
+          </a:ln>
+          <a:effectLst/>
+        </c:spPr>
+        <c:txPr>
+          <a:bodyPr rot="-60000000" spcFirstLastPara="1" vertOverflow="ellipsis" vert="horz" wrap="square" anchor="ctr" anchorCtr="1"/>
+          <a:lstStyle/>
+          <a:p>
+            <a:pPr>
+              <a:defRPr sz="1197" b="0" i="0" u="none" strike="noStrike" kern="1200" baseline="0">
+                <a:solidFill>
+                  <a:schemeClr val="bg1"/>
+                </a:solidFill>
+                <a:latin typeface="+mn-lt"/>
+                <a:ea typeface="+mn-ea"/>
+                <a:cs typeface="+mn-cs"/>
+              </a:defRPr>
+            </a:pPr>
+            <a:endParaRPr lang="uk-UA"/>
+          </a:p>
+        </c:txPr>
+        <c:crossAx val="884922719"/>
+        <c:crosses val="autoZero"/>
+        <c:auto val="1"/>
+        <c:lblAlgn val="ctr"/>
+        <c:lblOffset val="100"/>
+        <c:noMultiLvlLbl val="0"/>
+      </c:catAx>
+      <c:valAx>
+        <c:axId val="884922719"/>
+        <c:scaling>
+          <c:orientation val="minMax"/>
+        </c:scaling>
+        <c:delete val="0"/>
+        <c:axPos val="b"/>
+        <c:majorGridlines>
+          <c:spPr>
+            <a:ln w="9525" cap="flat" cmpd="sng" algn="ctr">
+              <a:solidFill>
+                <a:schemeClr val="tx1">
+                  <a:lumMod val="15000"/>
+                  <a:lumOff val="85000"/>
+                </a:schemeClr>
+              </a:solidFill>
+              <a:round/>
+            </a:ln>
+            <a:effectLst/>
+          </c:spPr>
+        </c:majorGridlines>
+        <c:numFmt formatCode="General" sourceLinked="1"/>
+        <c:majorTickMark val="none"/>
+        <c:minorTickMark val="none"/>
+        <c:tickLblPos val="nextTo"/>
+        <c:spPr>
+          <a:noFill/>
+          <a:ln>
+            <a:noFill/>
+          </a:ln>
+          <a:effectLst/>
+        </c:spPr>
+        <c:txPr>
+          <a:bodyPr rot="-60000000" spcFirstLastPara="1" vertOverflow="ellipsis" vert="horz" wrap="square" anchor="ctr" anchorCtr="1"/>
+          <a:lstStyle/>
+          <a:p>
+            <a:pPr>
+              <a:defRPr sz="1197" b="0" i="0" u="none" strike="noStrike" kern="1200" baseline="0">
+                <a:solidFill>
+                  <a:schemeClr val="bg1"/>
+                </a:solidFill>
+                <a:latin typeface="+mn-lt"/>
+                <a:ea typeface="+mn-ea"/>
+                <a:cs typeface="+mn-cs"/>
+              </a:defRPr>
+            </a:pPr>
+            <a:endParaRPr lang="uk-UA"/>
+          </a:p>
+        </c:txPr>
+        <c:crossAx val="884920319"/>
+        <c:crosses val="autoZero"/>
+        <c:crossBetween val="between"/>
+      </c:valAx>
+      <c:spPr>
+        <a:noFill/>
+        <a:ln>
+          <a:noFill/>
+        </a:ln>
+        <a:effectLst/>
+      </c:spPr>
+    </c:plotArea>
+    <c:plotVisOnly val="1"/>
+    <c:dispBlanksAs val="gap"/>
+    <c:showDLblsOverMax val="0"/>
+    <c:extLst>
+      <c:ext xmlns:c16r3="http://schemas.microsoft.com/office/drawing/2017/03/chart" uri="{56B9EC1D-385E-4148-901F-78D8002777C0}">
+        <c16r3:dataDisplayOptions16>
+          <c16r3:dispNaAsBlank val="1"/>
+        </c16r3:dataDisplayOptions16>
+      </c:ext>
+    </c:extLst>
+  </c:chart>
+  <c:spPr>
+    <a:noFill/>
+    <a:ln>
+      <a:noFill/>
+    </a:ln>
+    <a:effectLst/>
+  </c:spPr>
+  <c:txPr>
+    <a:bodyPr/>
+    <a:lstStyle/>
+    <a:p>
+      <a:pPr>
+        <a:defRPr/>
+      </a:pPr>
+      <a:endParaRPr lang="uk-UA"/>
+    </a:p>
+  </c:txPr>
+  <c:externalData r:id="rId3">
+    <c:autoUpdate val="0"/>
+  </c:externalData>
+</c:chartSpace>
+</file>
+
+<file path=ppt/charts/chart2.xml><?xml version="1.0" encoding="utf-8"?>
+<c:chartSpace xmlns:c="http://schemas.openxmlformats.org/drawingml/2006/chart" xmlns:a="http://schemas.openxmlformats.org/drawingml/2006/main" xmlns:r="http://schemas.openxmlformats.org/officeDocument/2006/relationships" xmlns:c16r2="http://schemas.microsoft.com/office/drawing/2015/06/chart">
+  <c:date1904 val="0"/>
+  <c:lang val="en-US"/>
+  <c:roundedCorners val="0"/>
+  <mc:AlternateContent xmlns:mc="http://schemas.openxmlformats.org/markup-compatibility/2006">
+    <mc:Choice xmlns:c14="http://schemas.microsoft.com/office/drawing/2007/8/2/chart" Requires="c14">
+      <c14:style val="102"/>
+    </mc:Choice>
+    <mc:Fallback>
+      <c:style val="2"/>
+    </mc:Fallback>
+  </mc:AlternateContent>
+  <c:chart>
+    <c:autoTitleDeleted val="1"/>
+    <c:plotArea>
       <c:layout>
         <c:manualLayout>
           <c:layoutTarget val="inner"/>
@@ -947,7 +1200,552 @@
 </cs:colorStyle>
 </file>
 
+<file path=ppt/charts/colors2.xml><?xml version="1.0" encoding="utf-8"?>
+<cs:colorStyle xmlns:cs="http://schemas.microsoft.com/office/drawing/2012/chartStyle" xmlns:a="http://schemas.openxmlformats.org/drawingml/2006/main" meth="cycle" id="10">
+  <a:schemeClr val="accent1"/>
+  <a:schemeClr val="accent2"/>
+  <a:schemeClr val="accent3"/>
+  <a:schemeClr val="accent4"/>
+  <a:schemeClr val="accent5"/>
+  <a:schemeClr val="accent6"/>
+  <cs:variation/>
+  <cs:variation>
+    <a:lumMod val="60000"/>
+  </cs:variation>
+  <cs:variation>
+    <a:lumMod val="80000"/>
+    <a:lumOff val="20000"/>
+  </cs:variation>
+  <cs:variation>
+    <a:lumMod val="80000"/>
+  </cs:variation>
+  <cs:variation>
+    <a:lumMod val="60000"/>
+    <a:lumOff val="40000"/>
+  </cs:variation>
+  <cs:variation>
+    <a:lumMod val="50000"/>
+  </cs:variation>
+  <cs:variation>
+    <a:lumMod val="70000"/>
+    <a:lumOff val="30000"/>
+  </cs:variation>
+  <cs:variation>
+    <a:lumMod val="70000"/>
+  </cs:variation>
+  <cs:variation>
+    <a:lumMod val="50000"/>
+    <a:lumOff val="50000"/>
+  </cs:variation>
+</cs:colorStyle>
+</file>
+
 <file path=ppt/charts/style1.xml><?xml version="1.0" encoding="utf-8"?>
+<cs:chartStyle xmlns:cs="http://schemas.microsoft.com/office/drawing/2012/chartStyle" xmlns:a="http://schemas.openxmlformats.org/drawingml/2006/main" id="216">
+  <cs:axisTitle>
+    <cs:lnRef idx="0"/>
+    <cs:fillRef idx="0"/>
+    <cs:effectRef idx="0"/>
+    <cs:fontRef idx="minor">
+      <a:schemeClr val="tx1">
+        <a:lumMod val="65000"/>
+        <a:lumOff val="35000"/>
+      </a:schemeClr>
+    </cs:fontRef>
+    <cs:defRPr sz="1330" kern="1200"/>
+  </cs:axisTitle>
+  <cs:categoryAxis>
+    <cs:lnRef idx="0"/>
+    <cs:fillRef idx="0"/>
+    <cs:effectRef idx="0"/>
+    <cs:fontRef idx="minor">
+      <a:schemeClr val="tx1">
+        <a:lumMod val="65000"/>
+        <a:lumOff val="35000"/>
+      </a:schemeClr>
+    </cs:fontRef>
+    <cs:spPr>
+      <a:ln w="9525" cap="flat" cmpd="sng" algn="ctr">
+        <a:solidFill>
+          <a:schemeClr val="tx1">
+            <a:lumMod val="15000"/>
+            <a:lumOff val="85000"/>
+          </a:schemeClr>
+        </a:solidFill>
+        <a:round/>
+      </a:ln>
+    </cs:spPr>
+    <cs:defRPr sz="1197" kern="1200"/>
+  </cs:categoryAxis>
+  <cs:chartArea mods="allowNoFillOverride allowNoLineOverride">
+    <cs:lnRef idx="0"/>
+    <cs:fillRef idx="0"/>
+    <cs:effectRef idx="0"/>
+    <cs:fontRef idx="minor">
+      <a:schemeClr val="tx1"/>
+    </cs:fontRef>
+    <cs:spPr>
+      <a:solidFill>
+        <a:schemeClr val="bg1"/>
+      </a:solidFill>
+      <a:ln w="9525" cap="flat" cmpd="sng" algn="ctr">
+        <a:solidFill>
+          <a:schemeClr val="tx1">
+            <a:lumMod val="15000"/>
+            <a:lumOff val="85000"/>
+          </a:schemeClr>
+        </a:solidFill>
+        <a:round/>
+      </a:ln>
+    </cs:spPr>
+    <cs:defRPr sz="1330" kern="1200"/>
+  </cs:chartArea>
+  <cs:dataLabel>
+    <cs:lnRef idx="0"/>
+    <cs:fillRef idx="0"/>
+    <cs:effectRef idx="0"/>
+    <cs:fontRef idx="minor">
+      <a:schemeClr val="tx1">
+        <a:lumMod val="75000"/>
+        <a:lumOff val="25000"/>
+      </a:schemeClr>
+    </cs:fontRef>
+    <cs:defRPr sz="1197" kern="1200"/>
+  </cs:dataLabel>
+  <cs:dataLabelCallout>
+    <cs:lnRef idx="0"/>
+    <cs:fillRef idx="0"/>
+    <cs:effectRef idx="0"/>
+    <cs:fontRef idx="minor">
+      <a:schemeClr val="dk1">
+        <a:lumMod val="65000"/>
+        <a:lumOff val="35000"/>
+      </a:schemeClr>
+    </cs:fontRef>
+    <cs:spPr>
+      <a:solidFill>
+        <a:schemeClr val="lt1"/>
+      </a:solidFill>
+      <a:ln>
+        <a:solidFill>
+          <a:schemeClr val="dk1">
+            <a:lumMod val="25000"/>
+            <a:lumOff val="75000"/>
+          </a:schemeClr>
+        </a:solidFill>
+      </a:ln>
+    </cs:spPr>
+    <cs:defRPr sz="1197" kern="1200"/>
+    <cs:bodyPr rot="0" spcFirstLastPara="1" vertOverflow="clip" horzOverflow="clip" vert="horz" wrap="square" lIns="36576" tIns="18288" rIns="36576" bIns="18288" anchor="ctr" anchorCtr="1">
+      <a:spAutoFit/>
+    </cs:bodyPr>
+  </cs:dataLabelCallout>
+  <cs:dataPoint>
+    <cs:lnRef idx="0"/>
+    <cs:fillRef idx="1">
+      <cs:styleClr val="auto"/>
+    </cs:fillRef>
+    <cs:effectRef idx="0"/>
+    <cs:fontRef idx="minor">
+      <a:schemeClr val="tx1"/>
+    </cs:fontRef>
+  </cs:dataPoint>
+  <cs:dataPoint3D>
+    <cs:lnRef idx="0"/>
+    <cs:fillRef idx="1">
+      <cs:styleClr val="auto"/>
+    </cs:fillRef>
+    <cs:effectRef idx="0"/>
+    <cs:fontRef idx="minor">
+      <a:schemeClr val="tx1"/>
+    </cs:fontRef>
+  </cs:dataPoint3D>
+  <cs:dataPointLine>
+    <cs:lnRef idx="0">
+      <cs:styleClr val="auto"/>
+    </cs:lnRef>
+    <cs:fillRef idx="1"/>
+    <cs:effectRef idx="0"/>
+    <cs:fontRef idx="minor">
+      <a:schemeClr val="tx1"/>
+    </cs:fontRef>
+    <cs:spPr>
+      <a:ln w="28575" cap="rnd">
+        <a:solidFill>
+          <a:schemeClr val="phClr"/>
+        </a:solidFill>
+        <a:round/>
+      </a:ln>
+    </cs:spPr>
+  </cs:dataPointLine>
+  <cs:dataPointMarker>
+    <cs:lnRef idx="0">
+      <cs:styleClr val="auto"/>
+    </cs:lnRef>
+    <cs:fillRef idx="1">
+      <cs:styleClr val="auto"/>
+    </cs:fillRef>
+    <cs:effectRef idx="0"/>
+    <cs:fontRef idx="minor">
+      <a:schemeClr val="tx1"/>
+    </cs:fontRef>
+    <cs:spPr>
+      <a:ln w="9525">
+        <a:solidFill>
+          <a:schemeClr val="phClr"/>
+        </a:solidFill>
+      </a:ln>
+    </cs:spPr>
+  </cs:dataPointMarker>
+  <cs:dataPointMarkerLayout symbol="circle" size="5"/>
+  <cs:dataPointWireframe>
+    <cs:lnRef idx="0">
+      <cs:styleClr val="auto"/>
+    </cs:lnRef>
+    <cs:fillRef idx="1"/>
+    <cs:effectRef idx="0"/>
+    <cs:fontRef idx="minor">
+      <a:schemeClr val="tx1"/>
+    </cs:fontRef>
+    <cs:spPr>
+      <a:ln w="9525" cap="rnd">
+        <a:solidFill>
+          <a:schemeClr val="phClr"/>
+        </a:solidFill>
+        <a:round/>
+      </a:ln>
+    </cs:spPr>
+  </cs:dataPointWireframe>
+  <cs:dataTable>
+    <cs:lnRef idx="0"/>
+    <cs:fillRef idx="0"/>
+    <cs:effectRef idx="0"/>
+    <cs:fontRef idx="minor">
+      <a:schemeClr val="tx1">
+        <a:lumMod val="65000"/>
+        <a:lumOff val="35000"/>
+      </a:schemeClr>
+    </cs:fontRef>
+    <cs:spPr>
+      <a:noFill/>
+      <a:ln w="9525" cap="flat" cmpd="sng" algn="ctr">
+        <a:solidFill>
+          <a:schemeClr val="tx1">
+            <a:lumMod val="15000"/>
+            <a:lumOff val="85000"/>
+          </a:schemeClr>
+        </a:solidFill>
+        <a:round/>
+      </a:ln>
+    </cs:spPr>
+    <cs:defRPr sz="1197" kern="1200"/>
+  </cs:dataTable>
+  <cs:downBar>
+    <cs:lnRef idx="0"/>
+    <cs:fillRef idx="0"/>
+    <cs:effectRef idx="0"/>
+    <cs:fontRef idx="minor">
+      <a:schemeClr val="tx1"/>
+    </cs:fontRef>
+    <cs:spPr>
+      <a:solidFill>
+        <a:schemeClr val="dk1">
+          <a:lumMod val="75000"/>
+          <a:lumOff val="25000"/>
+        </a:schemeClr>
+      </a:solidFill>
+      <a:ln w="9525" cap="flat" cmpd="sng" algn="ctr">
+        <a:solidFill>
+          <a:schemeClr val="tx1">
+            <a:lumMod val="65000"/>
+            <a:lumOff val="35000"/>
+          </a:schemeClr>
+        </a:solidFill>
+        <a:round/>
+      </a:ln>
+    </cs:spPr>
+  </cs:downBar>
+  <cs:dropLine>
+    <cs:lnRef idx="0"/>
+    <cs:fillRef idx="0"/>
+    <cs:effectRef idx="0"/>
+    <cs:fontRef idx="minor">
+      <a:schemeClr val="tx1"/>
+    </cs:fontRef>
+    <cs:spPr>
+      <a:ln w="9525" cap="flat" cmpd="sng" algn="ctr">
+        <a:solidFill>
+          <a:schemeClr val="tx1">
+            <a:lumMod val="35000"/>
+            <a:lumOff val="65000"/>
+          </a:schemeClr>
+        </a:solidFill>
+        <a:round/>
+      </a:ln>
+    </cs:spPr>
+  </cs:dropLine>
+  <cs:errorBar>
+    <cs:lnRef idx="0"/>
+    <cs:fillRef idx="0"/>
+    <cs:effectRef idx="0"/>
+    <cs:fontRef idx="minor">
+      <a:schemeClr val="tx1"/>
+    </cs:fontRef>
+    <cs:spPr>
+      <a:ln w="9525" cap="flat" cmpd="sng" algn="ctr">
+        <a:solidFill>
+          <a:schemeClr val="tx1">
+            <a:lumMod val="65000"/>
+            <a:lumOff val="35000"/>
+          </a:schemeClr>
+        </a:solidFill>
+        <a:round/>
+      </a:ln>
+    </cs:spPr>
+  </cs:errorBar>
+  <cs:floor>
+    <cs:lnRef idx="0"/>
+    <cs:fillRef idx="0"/>
+    <cs:effectRef idx="0"/>
+    <cs:fontRef idx="minor">
+      <a:schemeClr val="tx1"/>
+    </cs:fontRef>
+    <cs:spPr>
+      <a:noFill/>
+      <a:ln>
+        <a:noFill/>
+      </a:ln>
+    </cs:spPr>
+  </cs:floor>
+  <cs:gridlineMajor>
+    <cs:lnRef idx="0"/>
+    <cs:fillRef idx="0"/>
+    <cs:effectRef idx="0"/>
+    <cs:fontRef idx="minor">
+      <a:schemeClr val="tx1"/>
+    </cs:fontRef>
+    <cs:spPr>
+      <a:ln w="9525" cap="flat" cmpd="sng" algn="ctr">
+        <a:solidFill>
+          <a:schemeClr val="tx1">
+            <a:lumMod val="15000"/>
+            <a:lumOff val="85000"/>
+          </a:schemeClr>
+        </a:solidFill>
+        <a:round/>
+      </a:ln>
+    </cs:spPr>
+  </cs:gridlineMajor>
+  <cs:gridlineMinor>
+    <cs:lnRef idx="0"/>
+    <cs:fillRef idx="0"/>
+    <cs:effectRef idx="0"/>
+    <cs:fontRef idx="minor">
+      <a:schemeClr val="tx1"/>
+    </cs:fontRef>
+    <cs:spPr>
+      <a:ln w="9525" cap="flat" cmpd="sng" algn="ctr">
+        <a:solidFill>
+          <a:schemeClr val="tx1">
+            <a:lumMod val="5000"/>
+            <a:lumOff val="95000"/>
+          </a:schemeClr>
+        </a:solidFill>
+        <a:round/>
+      </a:ln>
+    </cs:spPr>
+  </cs:gridlineMinor>
+  <cs:hiLoLine>
+    <cs:lnRef idx="0"/>
+    <cs:fillRef idx="0"/>
+    <cs:effectRef idx="0"/>
+    <cs:fontRef idx="minor">
+      <a:schemeClr val="tx1"/>
+    </cs:fontRef>
+    <cs:spPr>
+      <a:ln w="9525" cap="flat" cmpd="sng" algn="ctr">
+        <a:solidFill>
+          <a:schemeClr val="tx1">
+            <a:lumMod val="50000"/>
+            <a:lumOff val="50000"/>
+          </a:schemeClr>
+        </a:solidFill>
+        <a:round/>
+      </a:ln>
+    </cs:spPr>
+  </cs:hiLoLine>
+  <cs:leaderLine>
+    <cs:lnRef idx="0"/>
+    <cs:fillRef idx="0"/>
+    <cs:effectRef idx="0"/>
+    <cs:fontRef idx="minor">
+      <a:schemeClr val="tx1"/>
+    </cs:fontRef>
+    <cs:spPr>
+      <a:ln w="9525" cap="flat" cmpd="sng" algn="ctr">
+        <a:solidFill>
+          <a:schemeClr val="tx1">
+            <a:lumMod val="35000"/>
+            <a:lumOff val="65000"/>
+          </a:schemeClr>
+        </a:solidFill>
+        <a:round/>
+      </a:ln>
+    </cs:spPr>
+  </cs:leaderLine>
+  <cs:legend>
+    <cs:lnRef idx="0"/>
+    <cs:fillRef idx="0"/>
+    <cs:effectRef idx="0"/>
+    <cs:fontRef idx="minor">
+      <a:schemeClr val="tx1">
+        <a:lumMod val="65000"/>
+        <a:lumOff val="35000"/>
+      </a:schemeClr>
+    </cs:fontRef>
+    <cs:defRPr sz="1197" kern="1200"/>
+  </cs:legend>
+  <cs:plotArea mods="allowNoFillOverride allowNoLineOverride">
+    <cs:lnRef idx="0"/>
+    <cs:fillRef idx="0"/>
+    <cs:effectRef idx="0"/>
+    <cs:fontRef idx="minor">
+      <a:schemeClr val="tx1"/>
+    </cs:fontRef>
+  </cs:plotArea>
+  <cs:plotArea3D mods="allowNoFillOverride allowNoLineOverride">
+    <cs:lnRef idx="0"/>
+    <cs:fillRef idx="0"/>
+    <cs:effectRef idx="0"/>
+    <cs:fontRef idx="minor">
+      <a:schemeClr val="tx1"/>
+    </cs:fontRef>
+  </cs:plotArea3D>
+  <cs:seriesAxis>
+    <cs:lnRef idx="0"/>
+    <cs:fillRef idx="0"/>
+    <cs:effectRef idx="0"/>
+    <cs:fontRef idx="minor">
+      <a:schemeClr val="tx1">
+        <a:lumMod val="65000"/>
+        <a:lumOff val="35000"/>
+      </a:schemeClr>
+    </cs:fontRef>
+    <cs:defRPr sz="1197" kern="1200"/>
+  </cs:seriesAxis>
+  <cs:seriesLine>
+    <cs:lnRef idx="0"/>
+    <cs:fillRef idx="0"/>
+    <cs:effectRef idx="0"/>
+    <cs:fontRef idx="minor">
+      <a:schemeClr val="tx1"/>
+    </cs:fontRef>
+    <cs:spPr>
+      <a:ln w="9525" cap="flat" cmpd="sng" algn="ctr">
+        <a:solidFill>
+          <a:schemeClr val="tx1">
+            <a:lumMod val="35000"/>
+            <a:lumOff val="65000"/>
+          </a:schemeClr>
+        </a:solidFill>
+        <a:round/>
+      </a:ln>
+    </cs:spPr>
+  </cs:seriesLine>
+  <cs:title>
+    <cs:lnRef idx="0"/>
+    <cs:fillRef idx="0"/>
+    <cs:effectRef idx="0"/>
+    <cs:fontRef idx="minor">
+      <a:schemeClr val="tx1">
+        <a:lumMod val="65000"/>
+        <a:lumOff val="35000"/>
+      </a:schemeClr>
+    </cs:fontRef>
+    <cs:defRPr sz="1862" b="0" kern="1200" spc="0" baseline="0"/>
+  </cs:title>
+  <cs:trendline>
+    <cs:lnRef idx="0">
+      <cs:styleClr val="auto"/>
+    </cs:lnRef>
+    <cs:fillRef idx="0"/>
+    <cs:effectRef idx="0"/>
+    <cs:fontRef idx="minor">
+      <a:schemeClr val="tx1"/>
+    </cs:fontRef>
+    <cs:spPr>
+      <a:ln w="19050" cap="rnd">
+        <a:solidFill>
+          <a:schemeClr val="phClr"/>
+        </a:solidFill>
+        <a:prstDash val="sysDot"/>
+      </a:ln>
+    </cs:spPr>
+  </cs:trendline>
+  <cs:trendlineLabel>
+    <cs:lnRef idx="0"/>
+    <cs:fillRef idx="0"/>
+    <cs:effectRef idx="0"/>
+    <cs:fontRef idx="minor">
+      <a:schemeClr val="tx1">
+        <a:lumMod val="65000"/>
+        <a:lumOff val="35000"/>
+      </a:schemeClr>
+    </cs:fontRef>
+    <cs:defRPr sz="1197" kern="1200"/>
+  </cs:trendlineLabel>
+  <cs:upBar>
+    <cs:lnRef idx="0"/>
+    <cs:fillRef idx="0"/>
+    <cs:effectRef idx="0"/>
+    <cs:fontRef idx="minor">
+      <a:schemeClr val="tx1"/>
+    </cs:fontRef>
+    <cs:spPr>
+      <a:solidFill>
+        <a:schemeClr val="lt1"/>
+      </a:solidFill>
+      <a:ln w="9525" cap="flat" cmpd="sng" algn="ctr">
+        <a:solidFill>
+          <a:schemeClr val="tx1">
+            <a:lumMod val="65000"/>
+            <a:lumOff val="35000"/>
+          </a:schemeClr>
+        </a:solidFill>
+        <a:round/>
+      </a:ln>
+    </cs:spPr>
+  </cs:upBar>
+  <cs:valueAxis>
+    <cs:lnRef idx="0"/>
+    <cs:fillRef idx="0"/>
+    <cs:effectRef idx="0"/>
+    <cs:fontRef idx="minor">
+      <a:schemeClr val="tx1">
+        <a:lumMod val="65000"/>
+        <a:lumOff val="35000"/>
+      </a:schemeClr>
+    </cs:fontRef>
+    <cs:defRPr sz="1197" kern="1200"/>
+  </cs:valueAxis>
+  <cs:wall>
+    <cs:lnRef idx="0"/>
+    <cs:fillRef idx="0"/>
+    <cs:effectRef idx="0"/>
+    <cs:fontRef idx="minor">
+      <a:schemeClr val="tx1"/>
+    </cs:fontRef>
+    <cs:spPr>
+      <a:noFill/>
+      <a:ln>
+        <a:noFill/>
+      </a:ln>
+    </cs:spPr>
+  </cs:wall>
+</cs:chartStyle>
+</file>
+
+<file path=ppt/charts/style2.xml><?xml version="1.0" encoding="utf-8"?>
 <cs:chartStyle xmlns:cs="http://schemas.microsoft.com/office/drawing/2012/chartStyle" xmlns:a="http://schemas.openxmlformats.org/drawingml/2006/main" id="321">
   <cs:axisTitle>
     <cs:lnRef idx="0"/>
@@ -1921,6 +2719,36 @@
           </a:bodyPr>
           <a:lstStyle/>
           <a:p>
+            <a:r>
+              <a:rPr lang="uk-UA" dirty="0"/>
+              <a:t>Шановна екзаменаційна комісія, дозвольте представити результати магістерської кваліфікаційної роботи на тему «Дослідження методів генерації безпечного шляху у 3</a:t>
+            </a:r>
+            <a:r>
+              <a:rPr lang="en-GB" dirty="0"/>
+              <a:t>D </a:t>
+            </a:r>
+            <a:r>
+              <a:rPr lang="uk-UA" dirty="0"/>
+              <a:t>просторі для </a:t>
+            </a:r>
+            <a:r>
+              <a:rPr lang="en-GB" dirty="0"/>
+              <a:t>NPC </a:t>
+            </a:r>
+            <a:r>
+              <a:rPr lang="uk-UA" dirty="0"/>
+              <a:t>у грі жанру </a:t>
+            </a:r>
+            <a:r>
+              <a:rPr lang="uk-UA" dirty="0" err="1"/>
+              <a:t>платформер</a:t>
+            </a:r>
+            <a:r>
+              <a:rPr lang="uk-UA" dirty="0"/>
+              <a:t>». Науковий керівник — доцент кафедри програмної  інженерії Наталя Сергіївна Кравець. </a:t>
+            </a:r>
+          </a:p>
+          <a:p>
             <a:pPr marL="0" lvl="0" indent="0" algn="l" rtl="0">
               <a:spcBef>
                 <a:spcPts val="0"/>
@@ -2739,7 +3567,7 @@
   <p:cSld>
     <p:spTree>
       <p:nvGrpSpPr>
-        <p:cNvPr id="1" name="Shape 157"/>
+        <p:cNvPr id="1" name="Shape 174"/>
         <p:cNvGrpSpPr/>
         <p:nvPr/>
       </p:nvGrpSpPr>
@@ -2753,7 +3581,7 @@
       </p:grpSpPr>
       <p:sp>
         <p:nvSpPr>
-          <p:cNvPr id="158" name="Google Shape;158;p7:notes"/>
+          <p:cNvPr id="175" name="Google Shape;175;p8:notes"/>
           <p:cNvSpPr txBox="1">
             <a:spLocks noGrp="1"/>
           </p:cNvSpPr>
@@ -2791,7 +3619,7 @@
       </p:sp>
       <p:sp>
         <p:nvSpPr>
-          <p:cNvPr id="159" name="Google Shape;159;p7:notes"/>
+          <p:cNvPr id="176" name="Google Shape;176;p8:notes"/>
           <p:cNvSpPr>
             <a:spLocks noGrp="1" noRot="1" noChangeAspect="1"/>
           </p:cNvSpPr>
@@ -2843,7 +3671,7 @@
   <p:cSld>
     <p:spTree>
       <p:nvGrpSpPr>
-        <p:cNvPr id="1" name="Shape 174"/>
+        <p:cNvPr id="1" name="Shape 157"/>
         <p:cNvGrpSpPr/>
         <p:nvPr/>
       </p:nvGrpSpPr>
@@ -2857,7 +3685,7 @@
       </p:grpSpPr>
       <p:sp>
         <p:nvSpPr>
-          <p:cNvPr id="175" name="Google Shape;175;p8:notes"/>
+          <p:cNvPr id="158" name="Google Shape;158;p7:notes"/>
           <p:cNvSpPr txBox="1">
             <a:spLocks noGrp="1"/>
           </p:cNvSpPr>
@@ -2895,7 +3723,7 @@
       </p:sp>
       <p:sp>
         <p:nvSpPr>
-          <p:cNvPr id="176" name="Google Shape;176;p8:notes"/>
+          <p:cNvPr id="159" name="Google Shape;159;p7:notes"/>
           <p:cNvSpPr>
             <a:spLocks noGrp="1" noRot="1" noChangeAspect="1"/>
           </p:cNvSpPr>
@@ -13426,7 +14254,7 @@
                 <a:cs typeface="Inter"/>
                 <a:sym typeface="Inter"/>
               </a:rPr>
-              <a:t>к.н.т</a:t>
+              <a:t>к.т.н</a:t>
             </a:r>
             <a:r>
               <a:rPr lang="uk-UA" sz="1350" dirty="0">
@@ -13438,7 +14266,7 @@
                 <a:cs typeface="Inter"/>
                 <a:sym typeface="Inter"/>
               </a:rPr>
-              <a:t>., </a:t>
+              <a:t>., доцент, </a:t>
             </a:r>
             <a:r>
               <a:rPr lang="en-US" sz="1350" b="0" i="0" u="none" strike="noStrike" cap="none" dirty="0" err="1">
@@ -14155,7 +14983,7 @@
         <p:spPr>
           <a:xfrm>
             <a:off x="914400" y="1847850"/>
-            <a:ext cx="4610100" cy="479821"/>
+            <a:ext cx="4610100" cy="872547"/>
           </a:xfrm>
           <a:prstGeom prst="rect">
             <a:avLst/>
@@ -14184,18 +15012,246 @@
               <a:buNone/>
             </a:pPr>
             <a:r>
-              <a:rPr lang="en-US" sz="1350" b="0" i="0" u="none" strike="noStrike" cap="none">
-                <a:solidFill>
-                  <a:srgbClr val="CBD5E1"/>
-                </a:solidFill>
-                <a:latin typeface="Inter"/>
-                <a:ea typeface="Inter"/>
-                <a:cs typeface="Inter"/>
-                <a:sym typeface="Inter"/>
-              </a:rPr>
-              <a:t>Тези доповіді опубліковано на 4-й Міжнародній конференції (Рига, Латвія, 2026).</a:t>
-            </a:r>
-            <a:endParaRPr/>
+              <a:rPr lang="en-US" sz="1350" b="0" i="0" u="none" strike="noStrike" cap="none" dirty="0" err="1">
+                <a:solidFill>
+                  <a:srgbClr val="CBD5E1"/>
+                </a:solidFill>
+                <a:latin typeface="Inter"/>
+                <a:ea typeface="Inter"/>
+                <a:cs typeface="Inter"/>
+                <a:sym typeface="Inter"/>
+              </a:rPr>
+              <a:t>Тези</a:t>
+            </a:r>
+            <a:r>
+              <a:rPr lang="en-US" sz="1350" b="0" i="0" u="none" strike="noStrike" cap="none" dirty="0">
+                <a:solidFill>
+                  <a:srgbClr val="CBD5E1"/>
+                </a:solidFill>
+                <a:latin typeface="Inter"/>
+                <a:ea typeface="Inter"/>
+                <a:cs typeface="Inter"/>
+                <a:sym typeface="Inter"/>
+              </a:rPr>
+              <a:t> </a:t>
+            </a:r>
+            <a:r>
+              <a:rPr lang="en-US" sz="1350" b="0" i="0" u="none" strike="noStrike" cap="none" dirty="0" err="1">
+                <a:solidFill>
+                  <a:srgbClr val="CBD5E1"/>
+                </a:solidFill>
+                <a:latin typeface="Inter"/>
+                <a:ea typeface="Inter"/>
+                <a:cs typeface="Inter"/>
+                <a:sym typeface="Inter"/>
+              </a:rPr>
+              <a:t>доповіді</a:t>
+            </a:r>
+            <a:r>
+              <a:rPr lang="en-US" sz="1350" b="0" i="0" u="none" strike="noStrike" cap="none" dirty="0">
+                <a:solidFill>
+                  <a:srgbClr val="CBD5E1"/>
+                </a:solidFill>
+                <a:latin typeface="Inter"/>
+                <a:ea typeface="Inter"/>
+                <a:cs typeface="Inter"/>
+                <a:sym typeface="Inter"/>
+              </a:rPr>
+              <a:t> </a:t>
+            </a:r>
+            <a:r>
+              <a:rPr lang="en-US" sz="1350" b="0" i="0" u="none" strike="noStrike" cap="none" dirty="0" err="1">
+                <a:solidFill>
+                  <a:srgbClr val="CBD5E1"/>
+                </a:solidFill>
+                <a:latin typeface="Inter"/>
+                <a:ea typeface="Inter"/>
+                <a:cs typeface="Inter"/>
+                <a:sym typeface="Inter"/>
+              </a:rPr>
+              <a:t>опубліковано</a:t>
+            </a:r>
+            <a:r>
+              <a:rPr lang="en-US" sz="1350" b="0" i="0" u="none" strike="noStrike" cap="none" dirty="0">
+                <a:solidFill>
+                  <a:srgbClr val="CBD5E1"/>
+                </a:solidFill>
+                <a:latin typeface="Inter"/>
+                <a:ea typeface="Inter"/>
+                <a:cs typeface="Inter"/>
+                <a:sym typeface="Inter"/>
+              </a:rPr>
+              <a:t> </a:t>
+            </a:r>
+            <a:r>
+              <a:rPr lang="en-US" sz="1350" b="0" i="0" u="none" strike="noStrike" cap="none" dirty="0" err="1">
+                <a:solidFill>
+                  <a:srgbClr val="CBD5E1"/>
+                </a:solidFill>
+                <a:latin typeface="Inter"/>
+                <a:ea typeface="Inter"/>
+                <a:cs typeface="Inter"/>
+                <a:sym typeface="Inter"/>
+              </a:rPr>
+              <a:t>на</a:t>
+            </a:r>
+            <a:r>
+              <a:rPr lang="en-US" sz="1350" b="0" i="0" u="none" strike="noStrike" cap="none" dirty="0">
+                <a:solidFill>
+                  <a:srgbClr val="CBD5E1"/>
+                </a:solidFill>
+                <a:latin typeface="Inter"/>
+                <a:ea typeface="Inter"/>
+                <a:cs typeface="Inter"/>
+                <a:sym typeface="Inter"/>
+              </a:rPr>
+              <a:t> 4-й </a:t>
+            </a:r>
+            <a:r>
+              <a:rPr lang="en-US" sz="1350" b="0" i="0" u="none" strike="noStrike" cap="none" dirty="0" err="1">
+                <a:solidFill>
+                  <a:srgbClr val="CBD5E1"/>
+                </a:solidFill>
+                <a:latin typeface="Inter"/>
+                <a:ea typeface="Inter"/>
+                <a:cs typeface="Inter"/>
+                <a:sym typeface="Inter"/>
+              </a:rPr>
+              <a:t>Міжнародній</a:t>
+            </a:r>
+            <a:r>
+              <a:rPr lang="en-US" sz="1350" b="0" i="0" u="none" strike="noStrike" cap="none" dirty="0">
+                <a:solidFill>
+                  <a:srgbClr val="CBD5E1"/>
+                </a:solidFill>
+                <a:latin typeface="Inter"/>
+                <a:ea typeface="Inter"/>
+                <a:cs typeface="Inter"/>
+                <a:sym typeface="Inter"/>
+              </a:rPr>
+              <a:t> </a:t>
+            </a:r>
+            <a:r>
+              <a:rPr lang="en-US" sz="1350" b="0" i="0" u="none" strike="noStrike" cap="none" dirty="0" err="1">
+                <a:solidFill>
+                  <a:srgbClr val="CBD5E1"/>
+                </a:solidFill>
+                <a:latin typeface="Inter"/>
+                <a:ea typeface="Inter"/>
+                <a:cs typeface="Inter"/>
+                <a:sym typeface="Inter"/>
+              </a:rPr>
+              <a:t>конференції</a:t>
+            </a:r>
+            <a:r>
+              <a:rPr lang="en-US" sz="1350" b="0" i="0" u="none" strike="noStrike" cap="none" dirty="0">
+                <a:solidFill>
+                  <a:srgbClr val="CBD5E1"/>
+                </a:solidFill>
+                <a:latin typeface="Inter"/>
+                <a:ea typeface="Inter"/>
+                <a:cs typeface="Inter"/>
+                <a:sym typeface="Inter"/>
+              </a:rPr>
+              <a:t> </a:t>
+            </a:r>
+            <a:r>
+              <a:rPr lang="uk-UA" sz="1350" b="0" i="0" u="none" strike="noStrike" cap="none" dirty="0">
+                <a:solidFill>
+                  <a:srgbClr val="CBD5E1"/>
+                </a:solidFill>
+                <a:latin typeface="Inter"/>
+                <a:ea typeface="Inter"/>
+                <a:cs typeface="Inter"/>
+                <a:sym typeface="Inter"/>
+              </a:rPr>
+              <a:t>«</a:t>
+            </a:r>
+            <a:r>
+              <a:rPr lang="en-US" sz="1350" b="0" i="0" u="none" strike="noStrike" cap="none" dirty="0">
+                <a:solidFill>
+                  <a:srgbClr val="CBD5E1"/>
+                </a:solidFill>
+                <a:latin typeface="Inter"/>
+                <a:ea typeface="Inter"/>
+                <a:cs typeface="Inter"/>
+                <a:sym typeface="Inter"/>
+              </a:rPr>
+              <a:t>Modern Scientific Research: Theoretical and Practical Aspects</a:t>
+            </a:r>
+            <a:r>
+              <a:rPr lang="uk-UA" sz="1350" b="0" i="0" u="none" strike="noStrike" cap="none" dirty="0">
+                <a:solidFill>
+                  <a:srgbClr val="CBD5E1"/>
+                </a:solidFill>
+                <a:latin typeface="Inter"/>
+                <a:ea typeface="Inter"/>
+                <a:cs typeface="Inter"/>
+                <a:sym typeface="Inter"/>
+              </a:rPr>
+              <a:t>»</a:t>
+            </a:r>
+            <a:r>
+              <a:rPr lang="en-US" sz="1350" b="0" i="0" u="none" strike="noStrike" cap="none" dirty="0">
+                <a:solidFill>
+                  <a:srgbClr val="CBD5E1"/>
+                </a:solidFill>
+                <a:latin typeface="Inter"/>
+                <a:ea typeface="Inter"/>
+                <a:cs typeface="Inter"/>
+                <a:sym typeface="Inter"/>
+              </a:rPr>
+              <a:t>(</a:t>
+            </a:r>
+            <a:r>
+              <a:rPr lang="en-US" sz="1350" b="0" i="0" u="none" strike="noStrike" cap="none" dirty="0" err="1">
+                <a:solidFill>
+                  <a:srgbClr val="CBD5E1"/>
+                </a:solidFill>
+                <a:latin typeface="Inter"/>
+                <a:ea typeface="Inter"/>
+                <a:cs typeface="Inter"/>
+                <a:sym typeface="Inter"/>
+              </a:rPr>
+              <a:t>Рига</a:t>
+            </a:r>
+            <a:r>
+              <a:rPr lang="en-US" sz="1350" b="0" i="0" u="none" strike="noStrike" cap="none" dirty="0">
+                <a:solidFill>
+                  <a:srgbClr val="CBD5E1"/>
+                </a:solidFill>
+                <a:latin typeface="Inter"/>
+                <a:ea typeface="Inter"/>
+                <a:cs typeface="Inter"/>
+                <a:sym typeface="Inter"/>
+              </a:rPr>
+              <a:t>, </a:t>
+            </a:r>
+            <a:r>
+              <a:rPr lang="en-US" sz="1350" b="0" i="0" u="none" strike="noStrike" cap="none" dirty="0" err="1">
+                <a:solidFill>
+                  <a:srgbClr val="CBD5E1"/>
+                </a:solidFill>
+                <a:latin typeface="Inter"/>
+                <a:ea typeface="Inter"/>
+                <a:cs typeface="Inter"/>
+                <a:sym typeface="Inter"/>
+              </a:rPr>
+              <a:t>Латвія</a:t>
+            </a:r>
+            <a:r>
+              <a:rPr lang="en-US" sz="1350" b="0" i="0" u="none" strike="noStrike" cap="none" dirty="0">
+                <a:solidFill>
+                  <a:srgbClr val="CBD5E1"/>
+                </a:solidFill>
+                <a:latin typeface="Inter"/>
+                <a:ea typeface="Inter"/>
+                <a:cs typeface="Inter"/>
+                <a:sym typeface="Inter"/>
+              </a:rPr>
+              <a:t>, 2026).</a:t>
+            </a:r>
+            <a:endParaRPr dirty="0"/>
           </a:p>
         </p:txBody>
       </p:sp>
@@ -14732,7 +15788,7 @@
         <p:spPr>
           <a:xfrm>
             <a:off x="2286000" y="2754808"/>
-            <a:ext cx="7620000" cy="1938992"/>
+            <a:ext cx="7620000" cy="1551194"/>
           </a:xfrm>
           <a:prstGeom prst="rect">
             <a:avLst/>
@@ -14782,7 +15838,7 @@
                 <a:cs typeface="Inter"/>
                 <a:sym typeface="Inter"/>
               </a:rPr>
-              <a:t> SVO+A* </a:t>
+              <a:t> </a:t>
             </a:r>
             <a:r>
               <a:rPr lang="en-US" sz="1800" b="0" i="0" u="none" strike="noStrike" cap="none" dirty="0" err="1">
@@ -14794,6 +15850,30 @@
                 <a:cs typeface="Inter"/>
                 <a:sym typeface="Inter"/>
               </a:rPr>
+              <a:t>Voxel+A</a:t>
+            </a:r>
+            <a:r>
+              <a:rPr lang="en-US" sz="1800" b="0" i="0" u="none" strike="noStrike" cap="none" dirty="0">
+                <a:solidFill>
+                  <a:srgbClr val="94A3B8"/>
+                </a:solidFill>
+                <a:latin typeface="Inter"/>
+                <a:ea typeface="Inter"/>
+                <a:cs typeface="Inter"/>
+                <a:sym typeface="Inter"/>
+              </a:rPr>
+              <a:t>* </a:t>
+            </a:r>
+            <a:r>
+              <a:rPr lang="en-US" sz="1800" b="0" i="0" u="none" strike="noStrike" cap="none" dirty="0" err="1">
+                <a:solidFill>
+                  <a:srgbClr val="94A3B8"/>
+                </a:solidFill>
+                <a:latin typeface="Inter"/>
+                <a:ea typeface="Inter"/>
+                <a:cs typeface="Inter"/>
+                <a:sym typeface="Inter"/>
+              </a:rPr>
               <a:t>забезпечує</a:t>
             </a:r>
             <a:r>
@@ -14975,102 +16055,6 @@
                 <a:sym typeface="Inter"/>
               </a:rPr>
               <a:t> </a:t>
-            </a:r>
-            <a:r>
-              <a:rPr lang="en-US" sz="1800" b="0" i="0" u="none" strike="noStrike" cap="none" dirty="0" err="1">
-                <a:solidFill>
-                  <a:srgbClr val="94A3B8"/>
-                </a:solidFill>
-                <a:latin typeface="Inter"/>
-                <a:ea typeface="Inter"/>
-                <a:cs typeface="Inter"/>
-                <a:sym typeface="Inter"/>
-              </a:rPr>
-              <a:t>та</a:t>
-            </a:r>
-            <a:r>
-              <a:rPr lang="en-US" sz="1800" b="0" i="0" u="none" strike="noStrike" cap="none" dirty="0">
-                <a:solidFill>
-                  <a:srgbClr val="94A3B8"/>
-                </a:solidFill>
-                <a:latin typeface="Inter"/>
-                <a:ea typeface="Inter"/>
-                <a:cs typeface="Inter"/>
-                <a:sym typeface="Inter"/>
-              </a:rPr>
-              <a:t> </a:t>
-            </a:r>
-            <a:r>
-              <a:rPr lang="en-US" sz="1800" b="0" i="0" u="none" strike="noStrike" cap="none" dirty="0" err="1">
-                <a:solidFill>
-                  <a:srgbClr val="94A3B8"/>
-                </a:solidFill>
-                <a:latin typeface="Inter"/>
-                <a:ea typeface="Inter"/>
-                <a:cs typeface="Inter"/>
-                <a:sym typeface="Inter"/>
-              </a:rPr>
-              <a:t>працює</a:t>
-            </a:r>
-            <a:r>
-              <a:rPr lang="en-US" sz="1800" b="0" i="0" u="none" strike="noStrike" cap="none" dirty="0">
-                <a:solidFill>
-                  <a:srgbClr val="94A3B8"/>
-                </a:solidFill>
-                <a:latin typeface="Inter"/>
-                <a:ea typeface="Inter"/>
-                <a:cs typeface="Inter"/>
-                <a:sym typeface="Inter"/>
-              </a:rPr>
-              <a:t> в </a:t>
-            </a:r>
-            <a:r>
-              <a:rPr lang="en-US" sz="1800" b="0" i="0" u="none" strike="noStrike" cap="none" dirty="0" err="1">
-                <a:solidFill>
-                  <a:srgbClr val="94A3B8"/>
-                </a:solidFill>
-                <a:latin typeface="Inter"/>
-                <a:ea typeface="Inter"/>
-                <a:cs typeface="Inter"/>
-                <a:sym typeface="Inter"/>
-              </a:rPr>
-              <a:t>реальному</a:t>
-            </a:r>
-            <a:r>
-              <a:rPr lang="en-US" sz="1800" b="0" i="0" u="none" strike="noStrike" cap="none" dirty="0">
-                <a:solidFill>
-                  <a:srgbClr val="94A3B8"/>
-                </a:solidFill>
-                <a:latin typeface="Inter"/>
-                <a:ea typeface="Inter"/>
-                <a:cs typeface="Inter"/>
-                <a:sym typeface="Inter"/>
-              </a:rPr>
-              <a:t> </a:t>
-            </a:r>
-            <a:r>
-              <a:rPr lang="en-US" sz="1800" b="0" i="0" u="none" strike="noStrike" cap="none" dirty="0" err="1">
-                <a:solidFill>
-                  <a:srgbClr val="94A3B8"/>
-                </a:solidFill>
-                <a:latin typeface="Inter"/>
-                <a:ea typeface="Inter"/>
-                <a:cs typeface="Inter"/>
-                <a:sym typeface="Inter"/>
-              </a:rPr>
-              <a:t>часі</a:t>
-            </a:r>
-            <a:r>
-              <a:rPr lang="en-US" sz="1800" b="0" i="0" u="none" strike="noStrike" cap="none" dirty="0">
-                <a:solidFill>
-                  <a:srgbClr val="94A3B8"/>
-                </a:solidFill>
-                <a:latin typeface="Inter"/>
-                <a:ea typeface="Inter"/>
-                <a:cs typeface="Inter"/>
-                <a:sym typeface="Inter"/>
-              </a:rPr>
-              <a:t>.</a:t>
             </a:r>
           </a:p>
           <a:p>
@@ -15407,8 +16391,8 @@
         </p:blipFill>
         <p:spPr>
           <a:xfrm>
-            <a:off x="581025" y="2730103"/>
-            <a:ext cx="5324475" cy="2226468"/>
+            <a:off x="581025" y="2286788"/>
+            <a:ext cx="3465820" cy="2790416"/>
           </a:xfrm>
           <a:prstGeom prst="rect">
             <a:avLst/>
@@ -15434,8 +16418,8 @@
         </p:blipFill>
         <p:spPr>
           <a:xfrm>
-            <a:off x="6286500" y="2730103"/>
-            <a:ext cx="5324475" cy="2226468"/>
+            <a:off x="7987143" y="2286788"/>
+            <a:ext cx="3403410" cy="2791820"/>
           </a:xfrm>
           <a:prstGeom prst="rect">
             <a:avLst/>
@@ -15454,7 +16438,7 @@
         </p:nvSpPr>
         <p:spPr>
           <a:xfrm>
-            <a:off x="876300" y="3025378"/>
+            <a:off x="876300" y="2595474"/>
             <a:ext cx="4970621" cy="333375"/>
           </a:xfrm>
           <a:prstGeom prst="rect">
@@ -15481,7 +16465,7 @@
               <a:buNone/>
             </a:pPr>
             <a:r>
-              <a:rPr lang="en-US" sz="1800" b="1" i="0" u="none" strike="noStrike" cap="none">
+              <a:rPr lang="en-US" sz="1800" b="1" i="0" u="none" strike="noStrike" cap="none" dirty="0" err="1">
                 <a:solidFill>
                   <a:srgbClr val="3B82F6"/>
                 </a:solidFill>
@@ -15490,9 +16474,33 @@
                 <a:cs typeface="Poppins"/>
                 <a:sym typeface="Poppins"/>
               </a:rPr>
-              <a:t>Специфіка Платформерів</a:t>
-            </a:r>
-            <a:endParaRPr/>
+              <a:t>Специфіка</a:t>
+            </a:r>
+            <a:r>
+              <a:rPr lang="en-US" sz="1800" b="1" i="0" u="none" strike="noStrike" cap="none" dirty="0">
+                <a:solidFill>
+                  <a:srgbClr val="3B82F6"/>
+                </a:solidFill>
+                <a:latin typeface="Poppins"/>
+                <a:ea typeface="Poppins"/>
+                <a:cs typeface="Poppins"/>
+                <a:sym typeface="Poppins"/>
+              </a:rPr>
+              <a:t> </a:t>
+            </a:r>
+            <a:r>
+              <a:rPr lang="en-US" sz="1800" b="1" i="0" u="none" strike="noStrike" cap="none" dirty="0" err="1">
+                <a:solidFill>
+                  <a:srgbClr val="3B82F6"/>
+                </a:solidFill>
+                <a:latin typeface="Poppins"/>
+                <a:ea typeface="Poppins"/>
+                <a:cs typeface="Poppins"/>
+                <a:sym typeface="Poppins"/>
+              </a:rPr>
+              <a:t>Платформерів</a:t>
+            </a:r>
+            <a:endParaRPr dirty="0"/>
           </a:p>
         </p:txBody>
       </p:sp>
@@ -15504,8 +16512,8 @@
         </p:nvSpPr>
         <p:spPr>
           <a:xfrm>
-            <a:off x="876300" y="3530203"/>
-            <a:ext cx="4733925" cy="959643"/>
+            <a:off x="876301" y="3100299"/>
+            <a:ext cx="2910954" cy="1163395"/>
           </a:xfrm>
           <a:prstGeom prst="rect">
             <a:avLst/>
@@ -15534,18 +16542,234 @@
               <a:buNone/>
             </a:pPr>
             <a:r>
-              <a:rPr lang="en-US" sz="1350" b="0" i="0" u="none" strike="noStrike" cap="none">
-                <a:solidFill>
-                  <a:srgbClr val="CBD5E1"/>
-                </a:solidFill>
-                <a:latin typeface="Inter"/>
-                <a:ea typeface="Inter"/>
-                <a:cs typeface="Inter"/>
-                <a:sym typeface="Inter"/>
-              </a:rPr>
-              <a:t>На відміну від RTS, агент у платформері повинен долати розриви геометрії, розраховуючи балістичні траєкторії стрибків з урахуванням гравітації та кінематичних обмежень.</a:t>
-            </a:r>
-            <a:endParaRPr/>
+              <a:rPr lang="en-US" sz="1350" b="0" i="0" u="none" strike="noStrike" cap="none" dirty="0" err="1">
+                <a:solidFill>
+                  <a:srgbClr val="CBD5E1"/>
+                </a:solidFill>
+                <a:latin typeface="Inter"/>
+                <a:ea typeface="Inter"/>
+                <a:cs typeface="Inter"/>
+                <a:sym typeface="Inter"/>
+              </a:rPr>
+              <a:t>На</a:t>
+            </a:r>
+            <a:r>
+              <a:rPr lang="en-US" sz="1350" b="0" i="0" u="none" strike="noStrike" cap="none" dirty="0">
+                <a:solidFill>
+                  <a:srgbClr val="CBD5E1"/>
+                </a:solidFill>
+                <a:latin typeface="Inter"/>
+                <a:ea typeface="Inter"/>
+                <a:cs typeface="Inter"/>
+                <a:sym typeface="Inter"/>
+              </a:rPr>
+              <a:t> </a:t>
+            </a:r>
+            <a:r>
+              <a:rPr lang="en-US" sz="1350" b="0" i="0" u="none" strike="noStrike" cap="none" dirty="0" err="1">
+                <a:solidFill>
+                  <a:srgbClr val="CBD5E1"/>
+                </a:solidFill>
+                <a:latin typeface="Inter"/>
+                <a:ea typeface="Inter"/>
+                <a:cs typeface="Inter"/>
+                <a:sym typeface="Inter"/>
+              </a:rPr>
+              <a:t>відміну</a:t>
+            </a:r>
+            <a:r>
+              <a:rPr lang="en-US" sz="1350" b="0" i="0" u="none" strike="noStrike" cap="none" dirty="0">
+                <a:solidFill>
+                  <a:srgbClr val="CBD5E1"/>
+                </a:solidFill>
+                <a:latin typeface="Inter"/>
+                <a:ea typeface="Inter"/>
+                <a:cs typeface="Inter"/>
+                <a:sym typeface="Inter"/>
+              </a:rPr>
+              <a:t> </a:t>
+            </a:r>
+            <a:r>
+              <a:rPr lang="en-US" sz="1350" b="0" i="0" u="none" strike="noStrike" cap="none" dirty="0" err="1">
+                <a:solidFill>
+                  <a:srgbClr val="CBD5E1"/>
+                </a:solidFill>
+                <a:latin typeface="Inter"/>
+                <a:ea typeface="Inter"/>
+                <a:cs typeface="Inter"/>
+                <a:sym typeface="Inter"/>
+              </a:rPr>
+              <a:t>від</a:t>
+            </a:r>
+            <a:r>
+              <a:rPr lang="en-US" sz="1350" b="0" i="0" u="none" strike="noStrike" cap="none" dirty="0">
+                <a:solidFill>
+                  <a:srgbClr val="CBD5E1"/>
+                </a:solidFill>
+                <a:latin typeface="Inter"/>
+                <a:ea typeface="Inter"/>
+                <a:cs typeface="Inter"/>
+                <a:sym typeface="Inter"/>
+              </a:rPr>
+              <a:t> RTS, </a:t>
+            </a:r>
+            <a:r>
+              <a:rPr lang="en-US" sz="1350" b="0" i="0" u="none" strike="noStrike" cap="none" dirty="0" err="1">
+                <a:solidFill>
+                  <a:srgbClr val="CBD5E1"/>
+                </a:solidFill>
+                <a:latin typeface="Inter"/>
+                <a:ea typeface="Inter"/>
+                <a:cs typeface="Inter"/>
+                <a:sym typeface="Inter"/>
+              </a:rPr>
+              <a:t>агент</a:t>
+            </a:r>
+            <a:r>
+              <a:rPr lang="en-US" sz="1350" b="0" i="0" u="none" strike="noStrike" cap="none" dirty="0">
+                <a:solidFill>
+                  <a:srgbClr val="CBD5E1"/>
+                </a:solidFill>
+                <a:latin typeface="Inter"/>
+                <a:ea typeface="Inter"/>
+                <a:cs typeface="Inter"/>
+                <a:sym typeface="Inter"/>
+              </a:rPr>
+              <a:t> у </a:t>
+            </a:r>
+            <a:r>
+              <a:rPr lang="en-US" sz="1350" b="0" i="0" u="none" strike="noStrike" cap="none" dirty="0" err="1">
+                <a:solidFill>
+                  <a:srgbClr val="CBD5E1"/>
+                </a:solidFill>
+                <a:latin typeface="Inter"/>
+                <a:ea typeface="Inter"/>
+                <a:cs typeface="Inter"/>
+                <a:sym typeface="Inter"/>
+              </a:rPr>
+              <a:t>платформері</a:t>
+            </a:r>
+            <a:r>
+              <a:rPr lang="en-US" sz="1350" b="0" i="0" u="none" strike="noStrike" cap="none" dirty="0">
+                <a:solidFill>
+                  <a:srgbClr val="CBD5E1"/>
+                </a:solidFill>
+                <a:latin typeface="Inter"/>
+                <a:ea typeface="Inter"/>
+                <a:cs typeface="Inter"/>
+                <a:sym typeface="Inter"/>
+              </a:rPr>
+              <a:t> </a:t>
+            </a:r>
+            <a:r>
+              <a:rPr lang="en-US" sz="1350" b="0" i="0" u="none" strike="noStrike" cap="none" dirty="0" err="1">
+                <a:solidFill>
+                  <a:srgbClr val="CBD5E1"/>
+                </a:solidFill>
+                <a:latin typeface="Inter"/>
+                <a:ea typeface="Inter"/>
+                <a:cs typeface="Inter"/>
+                <a:sym typeface="Inter"/>
+              </a:rPr>
+              <a:t>повинен</a:t>
+            </a:r>
+            <a:r>
+              <a:rPr lang="en-US" sz="1350" b="0" i="0" u="none" strike="noStrike" cap="none" dirty="0">
+                <a:solidFill>
+                  <a:srgbClr val="CBD5E1"/>
+                </a:solidFill>
+                <a:latin typeface="Inter"/>
+                <a:ea typeface="Inter"/>
+                <a:cs typeface="Inter"/>
+                <a:sym typeface="Inter"/>
+              </a:rPr>
+              <a:t> </a:t>
+            </a:r>
+            <a:r>
+              <a:rPr lang="en-US" sz="1350" b="0" i="0" u="none" strike="noStrike" cap="none" dirty="0" err="1">
+                <a:solidFill>
+                  <a:srgbClr val="CBD5E1"/>
+                </a:solidFill>
+                <a:latin typeface="Inter"/>
+                <a:ea typeface="Inter"/>
+                <a:cs typeface="Inter"/>
+                <a:sym typeface="Inter"/>
+              </a:rPr>
+              <a:t>долати</a:t>
+            </a:r>
+            <a:r>
+              <a:rPr lang="en-US" sz="1350" b="0" i="0" u="none" strike="noStrike" cap="none" dirty="0">
+                <a:solidFill>
+                  <a:srgbClr val="CBD5E1"/>
+                </a:solidFill>
+                <a:latin typeface="Inter"/>
+                <a:ea typeface="Inter"/>
+                <a:cs typeface="Inter"/>
+                <a:sym typeface="Inter"/>
+              </a:rPr>
+              <a:t> </a:t>
+            </a:r>
+            <a:r>
+              <a:rPr lang="en-US" sz="1350" b="0" i="0" u="none" strike="noStrike" cap="none" dirty="0" err="1">
+                <a:solidFill>
+                  <a:srgbClr val="CBD5E1"/>
+                </a:solidFill>
+                <a:latin typeface="Inter"/>
+                <a:ea typeface="Inter"/>
+                <a:cs typeface="Inter"/>
+                <a:sym typeface="Inter"/>
+              </a:rPr>
+              <a:t>розриви</a:t>
+            </a:r>
+            <a:r>
+              <a:rPr lang="en-US" sz="1350" b="0" i="0" u="none" strike="noStrike" cap="none" dirty="0">
+                <a:solidFill>
+                  <a:srgbClr val="CBD5E1"/>
+                </a:solidFill>
+                <a:latin typeface="Inter"/>
+                <a:ea typeface="Inter"/>
+                <a:cs typeface="Inter"/>
+                <a:sym typeface="Inter"/>
+              </a:rPr>
+              <a:t> </a:t>
+            </a:r>
+            <a:r>
+              <a:rPr lang="en-US" sz="1350" b="0" i="0" u="none" strike="noStrike" cap="none" dirty="0" err="1">
+                <a:solidFill>
+                  <a:srgbClr val="CBD5E1"/>
+                </a:solidFill>
+                <a:latin typeface="Inter"/>
+                <a:ea typeface="Inter"/>
+                <a:cs typeface="Inter"/>
+                <a:sym typeface="Inter"/>
+              </a:rPr>
+              <a:t>геометрії</a:t>
+            </a:r>
+            <a:r>
+              <a:rPr lang="en-US" sz="1350" b="0" i="0" u="none" strike="noStrike" cap="none" dirty="0">
+                <a:solidFill>
+                  <a:srgbClr val="CBD5E1"/>
+                </a:solidFill>
+                <a:latin typeface="Inter"/>
+                <a:ea typeface="Inter"/>
+                <a:cs typeface="Inter"/>
+                <a:sym typeface="Inter"/>
+              </a:rPr>
+              <a:t> з</a:t>
+            </a:r>
+            <a:r>
+              <a:rPr lang="uk-UA" sz="1350" b="0" i="0" u="none" strike="noStrike" cap="none" dirty="0">
+                <a:solidFill>
+                  <a:srgbClr val="CBD5E1"/>
+                </a:solidFill>
+                <a:latin typeface="Inter"/>
+                <a:ea typeface="Inter"/>
+                <a:cs typeface="Inter"/>
+                <a:sym typeface="Inter"/>
+              </a:rPr>
+              <a:t>а допомогою стрибків</a:t>
+            </a:r>
+            <a:endParaRPr dirty="0"/>
           </a:p>
         </p:txBody>
       </p:sp>
@@ -15557,7 +16781,7 @@
         </p:nvSpPr>
         <p:spPr>
           <a:xfrm>
-            <a:off x="6581775" y="3025378"/>
+            <a:off x="8282417" y="2595474"/>
             <a:ext cx="4970621" cy="333375"/>
           </a:xfrm>
           <a:prstGeom prst="rect">
@@ -15584,7 +16808,7 @@
               <a:buNone/>
             </a:pPr>
             <a:r>
-              <a:rPr lang="en-US" sz="1800" b="1" i="0" u="none" strike="noStrike" cap="none">
+              <a:rPr lang="en-US" sz="1800" b="1" i="0" u="none" strike="noStrike" cap="none" dirty="0" err="1">
                 <a:solidFill>
                   <a:srgbClr val="3B82F6"/>
                 </a:solidFill>
@@ -15593,9 +16817,33 @@
                 <a:cs typeface="Poppins"/>
                 <a:sym typeface="Poppins"/>
               </a:rPr>
-              <a:t>Мета Дослідження</a:t>
-            </a:r>
-            <a:endParaRPr/>
+              <a:t>Мета</a:t>
+            </a:r>
+            <a:r>
+              <a:rPr lang="en-US" sz="1800" b="1" i="0" u="none" strike="noStrike" cap="none" dirty="0">
+                <a:solidFill>
+                  <a:srgbClr val="3B82F6"/>
+                </a:solidFill>
+                <a:latin typeface="Poppins"/>
+                <a:ea typeface="Poppins"/>
+                <a:cs typeface="Poppins"/>
+                <a:sym typeface="Poppins"/>
+              </a:rPr>
+              <a:t> </a:t>
+            </a:r>
+            <a:r>
+              <a:rPr lang="en-US" sz="1800" b="1" i="0" u="none" strike="noStrike" cap="none" dirty="0" err="1">
+                <a:solidFill>
+                  <a:srgbClr val="3B82F6"/>
+                </a:solidFill>
+                <a:latin typeface="Poppins"/>
+                <a:ea typeface="Poppins"/>
+                <a:cs typeface="Poppins"/>
+                <a:sym typeface="Poppins"/>
+              </a:rPr>
+              <a:t>Дослідження</a:t>
+            </a:r>
+            <a:endParaRPr dirty="0"/>
           </a:p>
         </p:txBody>
       </p:sp>
@@ -15607,8 +16855,8 @@
         </p:nvSpPr>
         <p:spPr>
           <a:xfrm>
-            <a:off x="6581775" y="3530203"/>
-            <a:ext cx="4733925" cy="959643"/>
+            <a:off x="8282417" y="3100299"/>
+            <a:ext cx="3033073" cy="1745093"/>
           </a:xfrm>
           <a:prstGeom prst="rect">
             <a:avLst/>
@@ -15624,355 +16872,308 @@
           </a:bodyPr>
           <a:lstStyle/>
           <a:p>
-            <a:pPr marL="0" marR="0" lvl="0" indent="0" algn="l" rtl="0">
+            <a:pPr lvl="0">
               <a:lnSpc>
                 <a:spcPct val="139925"/>
               </a:lnSpc>
-              <a:spcBef>
-                <a:spcPts val="0"/>
-              </a:spcBef>
-              <a:spcAft>
-                <a:spcPts val="0"/>
-              </a:spcAft>
-              <a:buNone/>
             </a:pPr>
             <a:r>
-              <a:rPr lang="en-US" sz="1350" b="0" i="0" u="none" strike="noStrike" cap="none" dirty="0" err="1">
-                <a:solidFill>
-                  <a:srgbClr val="CBD5E1"/>
-                </a:solidFill>
-                <a:latin typeface="Inter"/>
-                <a:ea typeface="Inter"/>
-                <a:cs typeface="Inter"/>
-                <a:sym typeface="Inter"/>
-              </a:rPr>
-              <a:t>Розробити</a:t>
-            </a:r>
-            <a:r>
-              <a:rPr lang="en-US" sz="1350" b="0" i="0" u="none" strike="noStrike" cap="none" dirty="0">
-                <a:solidFill>
-                  <a:srgbClr val="CBD5E1"/>
-                </a:solidFill>
-                <a:latin typeface="Inter"/>
-                <a:ea typeface="Inter"/>
-                <a:cs typeface="Inter"/>
-                <a:sym typeface="Inter"/>
+              <a:rPr lang="ru-RU" sz="1350" dirty="0" err="1">
+                <a:solidFill>
+                  <a:srgbClr val="CBD5E1"/>
+                </a:solidFill>
+                <a:latin typeface="Inter" panose="020B0604020202020204" charset="0"/>
+                <a:ea typeface="Inter" panose="020B0604020202020204" charset="0"/>
+              </a:rPr>
+              <a:t>Розробка</a:t>
+            </a:r>
+            <a:r>
+              <a:rPr lang="ru-RU" sz="1350" dirty="0">
+                <a:solidFill>
+                  <a:srgbClr val="CBD5E1"/>
+                </a:solidFill>
+                <a:latin typeface="Inter" panose="020B0604020202020204" charset="0"/>
+                <a:ea typeface="Inter" panose="020B0604020202020204" charset="0"/>
+              </a:rPr>
+              <a:t> методу та </a:t>
+            </a:r>
+            <a:r>
+              <a:rPr lang="ru-RU" sz="1350" dirty="0" err="1">
+                <a:solidFill>
+                  <a:srgbClr val="CBD5E1"/>
+                </a:solidFill>
+                <a:latin typeface="Inter" panose="020B0604020202020204" charset="0"/>
+                <a:ea typeface="Inter" panose="020B0604020202020204" charset="0"/>
+              </a:rPr>
+              <a:t>програмна</a:t>
+            </a:r>
+            <a:r>
+              <a:rPr lang="ru-RU" sz="1350" dirty="0">
+                <a:solidFill>
+                  <a:srgbClr val="CBD5E1"/>
+                </a:solidFill>
+                <a:latin typeface="Inter" panose="020B0604020202020204" charset="0"/>
+                <a:ea typeface="Inter" panose="020B0604020202020204" charset="0"/>
               </a:rPr>
               <a:t> </a:t>
             </a:r>
             <a:r>
-              <a:rPr lang="en-US" sz="1350" b="0" i="0" u="none" strike="noStrike" cap="none" dirty="0" err="1">
-                <a:solidFill>
-                  <a:srgbClr val="CBD5E1"/>
-                </a:solidFill>
-                <a:latin typeface="Inter"/>
-                <a:ea typeface="Inter"/>
-                <a:cs typeface="Inter"/>
-                <a:sym typeface="Inter"/>
-              </a:rPr>
-              <a:t>метод</a:t>
-            </a:r>
-            <a:r>
-              <a:rPr lang="en-US" sz="1350" b="0" i="0" u="none" strike="noStrike" cap="none" dirty="0">
-                <a:solidFill>
-                  <a:srgbClr val="CBD5E1"/>
-                </a:solidFill>
-                <a:latin typeface="Inter"/>
-                <a:ea typeface="Inter"/>
-                <a:cs typeface="Inter"/>
-                <a:sym typeface="Inter"/>
+              <a:rPr lang="ru-RU" sz="1350" dirty="0" err="1">
+                <a:solidFill>
+                  <a:srgbClr val="CBD5E1"/>
+                </a:solidFill>
+                <a:latin typeface="Inter" panose="020B0604020202020204" charset="0"/>
+                <a:ea typeface="Inter" panose="020B0604020202020204" charset="0"/>
+              </a:rPr>
+              <a:t>реалізація</a:t>
+            </a:r>
+            <a:r>
+              <a:rPr lang="ru-RU" sz="1350" dirty="0">
+                <a:solidFill>
+                  <a:srgbClr val="CBD5E1"/>
+                </a:solidFill>
+                <a:latin typeface="Inter" panose="020B0604020202020204" charset="0"/>
+                <a:ea typeface="Inter" panose="020B0604020202020204" charset="0"/>
               </a:rPr>
               <a:t> </a:t>
             </a:r>
             <a:r>
-              <a:rPr lang="en-US" sz="1350" b="0" i="0" u="none" strike="noStrike" cap="none" dirty="0" err="1">
-                <a:solidFill>
-                  <a:srgbClr val="CBD5E1"/>
-                </a:solidFill>
-                <a:latin typeface="Inter"/>
-                <a:ea typeface="Inter"/>
-                <a:cs typeface="Inter"/>
-                <a:sym typeface="Inter"/>
-              </a:rPr>
-              <a:t>та</a:t>
-            </a:r>
-            <a:r>
-              <a:rPr lang="en-US" sz="1350" b="0" i="0" u="none" strike="noStrike" cap="none" dirty="0">
-                <a:solidFill>
-                  <a:srgbClr val="CBD5E1"/>
-                </a:solidFill>
-                <a:latin typeface="Inter"/>
-                <a:ea typeface="Inter"/>
-                <a:cs typeface="Inter"/>
-                <a:sym typeface="Inter"/>
+              <a:rPr lang="ru-RU" sz="1350" dirty="0" err="1">
+                <a:solidFill>
+                  <a:srgbClr val="CBD5E1"/>
+                </a:solidFill>
+                <a:latin typeface="Inter" panose="020B0604020202020204" charset="0"/>
+                <a:ea typeface="Inter" panose="020B0604020202020204" charset="0"/>
+              </a:rPr>
+              <a:t>системи</a:t>
+            </a:r>
+            <a:r>
+              <a:rPr lang="ru-RU" sz="1350" dirty="0">
+                <a:solidFill>
+                  <a:srgbClr val="CBD5E1"/>
+                </a:solidFill>
+                <a:latin typeface="Inter" panose="020B0604020202020204" charset="0"/>
+                <a:ea typeface="Inter" panose="020B0604020202020204" charset="0"/>
               </a:rPr>
               <a:t> </a:t>
             </a:r>
             <a:r>
-              <a:rPr lang="en-US" sz="1350" b="0" i="0" u="none" strike="noStrike" cap="none" dirty="0" err="1">
-                <a:solidFill>
-                  <a:srgbClr val="CBD5E1"/>
-                </a:solidFill>
-                <a:latin typeface="Inter"/>
-                <a:ea typeface="Inter"/>
-                <a:cs typeface="Inter"/>
-                <a:sym typeface="Inter"/>
-              </a:rPr>
-              <a:t>програмну</a:t>
-            </a:r>
-            <a:r>
-              <a:rPr lang="en-US" sz="1350" b="0" i="0" u="none" strike="noStrike" cap="none" dirty="0">
-                <a:solidFill>
-                  <a:srgbClr val="CBD5E1"/>
-                </a:solidFill>
-                <a:latin typeface="Inter"/>
-                <a:ea typeface="Inter"/>
-                <a:cs typeface="Inter"/>
-                <a:sym typeface="Inter"/>
+              <a:rPr lang="ru-RU" sz="1350" dirty="0" err="1">
+                <a:solidFill>
+                  <a:srgbClr val="CBD5E1"/>
+                </a:solidFill>
+                <a:latin typeface="Inter" panose="020B0604020202020204" charset="0"/>
+                <a:ea typeface="Inter" panose="020B0604020202020204" charset="0"/>
+              </a:rPr>
+              <a:t>генерації</a:t>
+            </a:r>
+            <a:r>
+              <a:rPr lang="ru-RU" sz="1350" dirty="0">
+                <a:solidFill>
+                  <a:srgbClr val="CBD5E1"/>
+                </a:solidFill>
+                <a:latin typeface="Inter" panose="020B0604020202020204" charset="0"/>
+                <a:ea typeface="Inter" panose="020B0604020202020204" charset="0"/>
               </a:rPr>
               <a:t> </a:t>
             </a:r>
             <a:r>
-              <a:rPr lang="en-US" sz="1350" b="0" i="0" u="none" strike="noStrike" cap="none" dirty="0" err="1">
-                <a:solidFill>
-                  <a:srgbClr val="CBD5E1"/>
-                </a:solidFill>
-                <a:latin typeface="Inter"/>
-                <a:ea typeface="Inter"/>
-                <a:cs typeface="Inter"/>
-                <a:sym typeface="Inter"/>
-              </a:rPr>
-              <a:t>систему</a:t>
-            </a:r>
-            <a:r>
-              <a:rPr lang="en-US" sz="1350" b="0" i="0" u="none" strike="noStrike" cap="none" dirty="0">
-                <a:solidFill>
-                  <a:srgbClr val="CBD5E1"/>
-                </a:solidFill>
-                <a:latin typeface="Inter"/>
-                <a:ea typeface="Inter"/>
-                <a:cs typeface="Inter"/>
-                <a:sym typeface="Inter"/>
+              <a:rPr lang="ru-RU" sz="1350" dirty="0" err="1">
+                <a:solidFill>
+                  <a:srgbClr val="CBD5E1"/>
+                </a:solidFill>
+                <a:latin typeface="Inter" panose="020B0604020202020204" charset="0"/>
+                <a:ea typeface="Inter" panose="020B0604020202020204" charset="0"/>
+              </a:rPr>
+              <a:t>безпечного</a:t>
+            </a:r>
+            <a:r>
+              <a:rPr lang="ru-RU" sz="1350" dirty="0">
+                <a:solidFill>
+                  <a:srgbClr val="CBD5E1"/>
+                </a:solidFill>
+                <a:latin typeface="Inter" panose="020B0604020202020204" charset="0"/>
+                <a:ea typeface="Inter" panose="020B0604020202020204" charset="0"/>
+              </a:rPr>
+              <a:t> маршруту, </a:t>
+            </a:r>
+            <a:r>
+              <a:rPr lang="ru-RU" sz="1350" dirty="0" err="1">
+                <a:solidFill>
+                  <a:srgbClr val="CBD5E1"/>
+                </a:solidFill>
+                <a:latin typeface="Inter" panose="020B0604020202020204" charset="0"/>
+                <a:ea typeface="Inter" panose="020B0604020202020204" charset="0"/>
+              </a:rPr>
+              <a:t>що</a:t>
+            </a:r>
+            <a:r>
+              <a:rPr lang="ru-RU" sz="1350" dirty="0">
+                <a:solidFill>
+                  <a:srgbClr val="CBD5E1"/>
+                </a:solidFill>
+                <a:latin typeface="Inter" panose="020B0604020202020204" charset="0"/>
+                <a:ea typeface="Inter" panose="020B0604020202020204" charset="0"/>
               </a:rPr>
               <a:t> </a:t>
             </a:r>
             <a:r>
-              <a:rPr lang="en-US" sz="1350" b="0" i="0" u="none" strike="noStrike" cap="none" dirty="0" err="1">
-                <a:solidFill>
-                  <a:srgbClr val="CBD5E1"/>
-                </a:solidFill>
-                <a:latin typeface="Inter"/>
-                <a:ea typeface="Inter"/>
-                <a:cs typeface="Inter"/>
-                <a:sym typeface="Inter"/>
-              </a:rPr>
-              <a:t>автоматизованого</a:t>
-            </a:r>
-            <a:r>
-              <a:rPr lang="en-US" sz="1350" b="0" i="0" u="none" strike="noStrike" cap="none" dirty="0">
-                <a:solidFill>
-                  <a:srgbClr val="CBD5E1"/>
-                </a:solidFill>
-                <a:latin typeface="Inter"/>
-                <a:ea typeface="Inter"/>
-                <a:cs typeface="Inter"/>
-                <a:sym typeface="Inter"/>
+              <a:rPr lang="ru-RU" sz="1350" dirty="0" err="1">
+                <a:solidFill>
+                  <a:srgbClr val="CBD5E1"/>
+                </a:solidFill>
+                <a:latin typeface="Inter" panose="020B0604020202020204" charset="0"/>
+                <a:ea typeface="Inter" panose="020B0604020202020204" charset="0"/>
+              </a:rPr>
+              <a:t>враховує</a:t>
+            </a:r>
+            <a:r>
+              <a:rPr lang="ru-RU" sz="1350" dirty="0">
+                <a:solidFill>
+                  <a:srgbClr val="CBD5E1"/>
+                </a:solidFill>
+                <a:latin typeface="Inter" panose="020B0604020202020204" charset="0"/>
+                <a:ea typeface="Inter" panose="020B0604020202020204" charset="0"/>
               </a:rPr>
               <a:t> </a:t>
             </a:r>
             <a:r>
-              <a:rPr lang="en-US" sz="1350" b="0" i="0" u="none" strike="noStrike" cap="none" dirty="0" err="1">
-                <a:solidFill>
-                  <a:srgbClr val="CBD5E1"/>
-                </a:solidFill>
-                <a:latin typeface="Inter"/>
-                <a:ea typeface="Inter"/>
-                <a:cs typeface="Inter"/>
-                <a:sym typeface="Inter"/>
-              </a:rPr>
-              <a:t>планування</a:t>
-            </a:r>
-            <a:r>
-              <a:rPr lang="en-US" sz="1350" b="0" i="0" u="none" strike="noStrike" cap="none" dirty="0">
-                <a:solidFill>
-                  <a:srgbClr val="CBD5E1"/>
-                </a:solidFill>
-                <a:latin typeface="Inter"/>
-                <a:ea typeface="Inter"/>
-                <a:cs typeface="Inter"/>
-                <a:sym typeface="Inter"/>
+              <a:rPr lang="ru-RU" sz="1350" dirty="0" err="1">
+                <a:solidFill>
+                  <a:srgbClr val="CBD5E1"/>
+                </a:solidFill>
+                <a:latin typeface="Inter" panose="020B0604020202020204" charset="0"/>
+                <a:ea typeface="Inter" panose="020B0604020202020204" charset="0"/>
+              </a:rPr>
+              <a:t>вертикальну</a:t>
+            </a:r>
+            <a:r>
+              <a:rPr lang="ru-RU" sz="1350" dirty="0">
+                <a:solidFill>
+                  <a:srgbClr val="CBD5E1"/>
+                </a:solidFill>
+                <a:latin typeface="Inter" panose="020B0604020202020204" charset="0"/>
+                <a:ea typeface="Inter" panose="020B0604020202020204" charset="0"/>
               </a:rPr>
               <a:t> </a:t>
             </a:r>
             <a:r>
-              <a:rPr lang="en-US" sz="1350" b="0" i="0" u="none" strike="noStrike" cap="none" dirty="0" err="1">
-                <a:solidFill>
-                  <a:srgbClr val="CBD5E1"/>
-                </a:solidFill>
-                <a:latin typeface="Inter"/>
-                <a:ea typeface="Inter"/>
-                <a:cs typeface="Inter"/>
-                <a:sym typeface="Inter"/>
-              </a:rPr>
-              <a:t>руху</a:t>
-            </a:r>
-            <a:r>
-              <a:rPr lang="en-US" sz="1350" b="0" i="0" u="none" strike="noStrike" cap="none" dirty="0">
-                <a:solidFill>
-                  <a:srgbClr val="CBD5E1"/>
-                </a:solidFill>
-                <a:latin typeface="Inter"/>
-                <a:ea typeface="Inter"/>
-                <a:cs typeface="Inter"/>
-                <a:sym typeface="Inter"/>
-              </a:rPr>
-              <a:t> в </a:t>
-            </a:r>
-            <a:r>
-              <a:rPr lang="en-US" sz="1350" b="0" i="0" u="none" strike="noStrike" cap="none" dirty="0" err="1">
-                <a:solidFill>
-                  <a:srgbClr val="CBD5E1"/>
-                </a:solidFill>
-                <a:latin typeface="Inter"/>
-                <a:ea typeface="Inter"/>
-                <a:cs typeface="Inter"/>
-                <a:sym typeface="Inter"/>
-              </a:rPr>
-              <a:t>дискретних</a:t>
-            </a:r>
-            <a:r>
-              <a:rPr lang="en-US" sz="1350" b="0" i="0" u="none" strike="noStrike" cap="none" dirty="0">
-                <a:solidFill>
-                  <a:srgbClr val="CBD5E1"/>
-                </a:solidFill>
-                <a:latin typeface="Inter"/>
-                <a:ea typeface="Inter"/>
-                <a:cs typeface="Inter"/>
-                <a:sym typeface="Inter"/>
-              </a:rPr>
-              <a:t> 3D </a:t>
-            </a:r>
-            <a:r>
-              <a:rPr lang="en-US" sz="1350" b="0" i="0" u="none" strike="noStrike" cap="none" dirty="0" err="1">
-                <a:solidFill>
-                  <a:srgbClr val="CBD5E1"/>
-                </a:solidFill>
-                <a:latin typeface="Inter"/>
-                <a:ea typeface="Inter"/>
-                <a:cs typeface="Inter"/>
-                <a:sym typeface="Inter"/>
-              </a:rPr>
-              <a:t>просторах</a:t>
-            </a:r>
-            <a:r>
-              <a:rPr lang="en-US" sz="1350" b="0" i="0" u="none" strike="noStrike" cap="none" dirty="0">
-                <a:solidFill>
-                  <a:srgbClr val="CBD5E1"/>
-                </a:solidFill>
-                <a:latin typeface="Inter"/>
-                <a:ea typeface="Inter"/>
-                <a:cs typeface="Inter"/>
-                <a:sym typeface="Inter"/>
+              <a:rPr lang="ru-RU" sz="1350" dirty="0" err="1">
+                <a:solidFill>
+                  <a:srgbClr val="CBD5E1"/>
+                </a:solidFill>
+                <a:latin typeface="Inter" panose="020B0604020202020204" charset="0"/>
+                <a:ea typeface="Inter" panose="020B0604020202020204" charset="0"/>
+              </a:rPr>
+              <a:t>топологію</a:t>
+            </a:r>
+            <a:r>
+              <a:rPr lang="ru-RU" sz="1350" dirty="0">
+                <a:solidFill>
+                  <a:srgbClr val="CBD5E1"/>
+                </a:solidFill>
+                <a:latin typeface="Inter" panose="020B0604020202020204" charset="0"/>
+                <a:ea typeface="Inter" panose="020B0604020202020204" charset="0"/>
               </a:rPr>
               <a:t> </a:t>
             </a:r>
             <a:r>
-              <a:rPr lang="en-US" sz="1350" b="0" i="0" u="none" strike="noStrike" cap="none" dirty="0" err="1">
-                <a:solidFill>
-                  <a:srgbClr val="CBD5E1"/>
-                </a:solidFill>
-                <a:latin typeface="Inter"/>
-                <a:ea typeface="Inter"/>
-                <a:cs typeface="Inter"/>
-                <a:sym typeface="Inter"/>
-              </a:rPr>
-              <a:t>без</a:t>
-            </a:r>
-            <a:r>
-              <a:rPr lang="en-US" sz="1350" b="0" i="0" u="none" strike="noStrike" cap="none" dirty="0">
-                <a:solidFill>
-                  <a:srgbClr val="CBD5E1"/>
-                </a:solidFill>
-                <a:latin typeface="Inter"/>
-                <a:ea typeface="Inter"/>
-                <a:cs typeface="Inter"/>
-                <a:sym typeface="Inter"/>
+              <a:rPr lang="ru-RU" sz="1350" dirty="0" err="1">
+                <a:solidFill>
+                  <a:srgbClr val="CBD5E1"/>
+                </a:solidFill>
+                <a:latin typeface="Inter" panose="020B0604020202020204" charset="0"/>
+                <a:ea typeface="Inter" panose="020B0604020202020204" charset="0"/>
+              </a:rPr>
+              <a:t>сцени</a:t>
+            </a:r>
+            <a:r>
+              <a:rPr lang="ru-RU" sz="1350" dirty="0">
+                <a:solidFill>
+                  <a:srgbClr val="CBD5E1"/>
+                </a:solidFill>
+                <a:latin typeface="Inter" panose="020B0604020202020204" charset="0"/>
+                <a:ea typeface="Inter" panose="020B0604020202020204" charset="0"/>
+              </a:rPr>
+              <a:t> та </a:t>
+            </a:r>
+            <a:r>
+              <a:rPr lang="ru-RU" sz="1350" dirty="0" err="1">
+                <a:solidFill>
+                  <a:srgbClr val="CBD5E1"/>
+                </a:solidFill>
+                <a:latin typeface="Inter" panose="020B0604020202020204" charset="0"/>
+                <a:ea typeface="Inter" panose="020B0604020202020204" charset="0"/>
+              </a:rPr>
+              <a:t>кінематичні</a:t>
+            </a:r>
+            <a:r>
+              <a:rPr lang="ru-RU" sz="1350" dirty="0">
+                <a:solidFill>
+                  <a:srgbClr val="CBD5E1"/>
+                </a:solidFill>
+                <a:latin typeface="Inter" panose="020B0604020202020204" charset="0"/>
+                <a:ea typeface="Inter" panose="020B0604020202020204" charset="0"/>
               </a:rPr>
               <a:t> </a:t>
             </a:r>
             <a:r>
-              <a:rPr lang="en-US" sz="1350" b="0" i="0" u="none" strike="noStrike" cap="none" dirty="0" err="1">
-                <a:solidFill>
-                  <a:srgbClr val="CBD5E1"/>
-                </a:solidFill>
-                <a:latin typeface="Inter"/>
-                <a:ea typeface="Inter"/>
-                <a:cs typeface="Inter"/>
-                <a:sym typeface="Inter"/>
-              </a:rPr>
-              <a:t>ручного</a:t>
-            </a:r>
-            <a:r>
-              <a:rPr lang="en-US" sz="1350" b="0" i="0" u="none" strike="noStrike" cap="none" dirty="0">
-                <a:solidFill>
-                  <a:srgbClr val="CBD5E1"/>
-                </a:solidFill>
-                <a:latin typeface="Inter"/>
-                <a:ea typeface="Inter"/>
-                <a:cs typeface="Inter"/>
-                <a:sym typeface="Inter"/>
+              <a:rPr lang="ru-RU" sz="1350" dirty="0" err="1">
+                <a:solidFill>
+                  <a:srgbClr val="CBD5E1"/>
+                </a:solidFill>
+                <a:latin typeface="Inter" panose="020B0604020202020204" charset="0"/>
+                <a:ea typeface="Inter" panose="020B0604020202020204" charset="0"/>
+              </a:rPr>
+              <a:t>обмеження</a:t>
+            </a:r>
+            <a:r>
+              <a:rPr lang="ru-RU" sz="1350" dirty="0">
+                <a:solidFill>
+                  <a:srgbClr val="CBD5E1"/>
+                </a:solidFill>
+                <a:latin typeface="Inter" panose="020B0604020202020204" charset="0"/>
+                <a:ea typeface="Inter" panose="020B0604020202020204" charset="0"/>
               </a:rPr>
               <a:t> </a:t>
             </a:r>
             <a:r>
-              <a:rPr lang="en-US" sz="1350" b="0" i="0" u="none" strike="noStrike" cap="none" dirty="0" err="1">
-                <a:solidFill>
-                  <a:srgbClr val="CBD5E1"/>
-                </a:solidFill>
-                <a:latin typeface="Inter"/>
-                <a:ea typeface="Inter"/>
-                <a:cs typeface="Inter"/>
-                <a:sym typeface="Inter"/>
-              </a:rPr>
-              <a:t>розставлення</a:t>
-            </a:r>
-            <a:r>
-              <a:rPr lang="en-US" sz="1350" b="0" i="0" u="none" strike="noStrike" cap="none" dirty="0">
-                <a:solidFill>
-                  <a:srgbClr val="CBD5E1"/>
-                </a:solidFill>
-                <a:latin typeface="Inter"/>
-                <a:ea typeface="Inter"/>
-                <a:cs typeface="Inter"/>
-                <a:sym typeface="Inter"/>
-              </a:rPr>
-              <a:t> Off-Mesh Links </a:t>
-            </a:r>
-            <a:r>
-              <a:rPr lang="en-US" sz="1350" b="0" i="0" u="none" strike="noStrike" cap="none" dirty="0" err="1">
-                <a:solidFill>
-                  <a:srgbClr val="CBD5E1"/>
-                </a:solidFill>
-                <a:latin typeface="Inter"/>
-                <a:ea typeface="Inter"/>
-                <a:cs typeface="Inter"/>
-                <a:sym typeface="Inter"/>
-              </a:rPr>
-              <a:t>дизайнером</a:t>
-            </a:r>
-            <a:r>
-              <a:rPr lang="en-US" sz="1350" b="0" i="0" u="none" strike="noStrike" cap="none" dirty="0">
-                <a:solidFill>
-                  <a:srgbClr val="CBD5E1"/>
-                </a:solidFill>
-                <a:latin typeface="Inter"/>
-                <a:ea typeface="Inter"/>
-                <a:cs typeface="Inter"/>
-                <a:sym typeface="Inter"/>
-              </a:rPr>
-              <a:t>.</a:t>
-            </a:r>
-            <a:endParaRPr dirty="0"/>
+              <a:rPr lang="ru-RU" sz="1350" dirty="0" err="1">
+                <a:solidFill>
+                  <a:srgbClr val="CBD5E1"/>
+                </a:solidFill>
+                <a:latin typeface="Inter" panose="020B0604020202020204" charset="0"/>
+                <a:ea typeface="Inter" panose="020B0604020202020204" charset="0"/>
+              </a:rPr>
+              <a:t>фізики</a:t>
+            </a:r>
+            <a:r>
+              <a:rPr lang="ru-RU" sz="1350" dirty="0">
+                <a:solidFill>
+                  <a:srgbClr val="CBD5E1"/>
+                </a:solidFill>
+                <a:latin typeface="Inter" panose="020B0604020202020204" charset="0"/>
+                <a:ea typeface="Inter" panose="020B0604020202020204" charset="0"/>
+              </a:rPr>
+              <a:t> </a:t>
+            </a:r>
+            <a:r>
+              <a:rPr lang="ru-RU" sz="1350" dirty="0" err="1">
+                <a:solidFill>
+                  <a:srgbClr val="CBD5E1"/>
+                </a:solidFill>
+                <a:latin typeface="Inter" panose="020B0604020202020204" charset="0"/>
+                <a:ea typeface="Inter" panose="020B0604020202020204" charset="0"/>
+              </a:rPr>
+              <a:t>стрибка</a:t>
+            </a:r>
+            <a:endParaRPr sz="1350" dirty="0">
+              <a:solidFill>
+                <a:srgbClr val="CBD5E1"/>
+              </a:solidFill>
+              <a:latin typeface="Inter" panose="020B0604020202020204" charset="0"/>
+              <a:ea typeface="Inter" panose="020B0604020202020204" charset="0"/>
+            </a:endParaRPr>
           </a:p>
         </p:txBody>
       </p:sp>
@@ -16132,6 +17333,299 @@
               <a:solidFill>
                 <a:schemeClr val="bg1"/>
               </a:solidFill>
+            </a:endParaRPr>
+          </a:p>
+        </p:txBody>
+      </p:sp>
+      <p:pic>
+        <p:nvPicPr>
+          <p:cNvPr id="3" name="Google Shape;104;p15" descr="image.png">
+            <a:extLst>
+              <a:ext uri="{FF2B5EF4-FFF2-40B4-BE49-F238E27FC236}">
+                <a16:creationId xmlns:a16="http://schemas.microsoft.com/office/drawing/2014/main" id="{C52C3113-498B-EC07-F1C6-3BF2BE170BEA}"/>
+              </a:ext>
+            </a:extLst>
+          </p:cNvPr>
+          <p:cNvPicPr preferRelativeResize="0"/>
+          <p:nvPr/>
+        </p:nvPicPr>
+        <p:blipFill rotWithShape="1">
+          <a:blip r:embed="rId4">
+            <a:alphaModFix/>
+          </a:blip>
+          <a:srcRect/>
+          <a:stretch/>
+        </p:blipFill>
+        <p:spPr>
+          <a:xfrm>
+            <a:off x="4261733" y="2286788"/>
+            <a:ext cx="3465820" cy="2790416"/>
+          </a:xfrm>
+          <a:prstGeom prst="rect">
+            <a:avLst/>
+          </a:prstGeom>
+          <a:noFill/>
+          <a:ln>
+            <a:noFill/>
+          </a:ln>
+        </p:spPr>
+      </p:pic>
+      <p:sp>
+        <p:nvSpPr>
+          <p:cNvPr id="4" name="Google Shape;106;p15">
+            <a:extLst>
+              <a:ext uri="{FF2B5EF4-FFF2-40B4-BE49-F238E27FC236}">
+                <a16:creationId xmlns:a16="http://schemas.microsoft.com/office/drawing/2014/main" id="{FE0A6D85-29E8-33DD-992E-C02CC8331BFD}"/>
+              </a:ext>
+            </a:extLst>
+          </p:cNvPr>
+          <p:cNvSpPr txBox="1"/>
+          <p:nvPr/>
+        </p:nvSpPr>
+        <p:spPr>
+          <a:xfrm>
+            <a:off x="4557008" y="2595474"/>
+            <a:ext cx="4970621" cy="276999"/>
+          </a:xfrm>
+          <a:prstGeom prst="rect">
+            <a:avLst/>
+          </a:prstGeom>
+          <a:noFill/>
+          <a:ln>
+            <a:noFill/>
+          </a:ln>
+        </p:spPr>
+        <p:txBody>
+          <a:bodyPr spcFirstLastPara="1" wrap="square" lIns="0" tIns="0" rIns="0" bIns="0" anchor="t" anchorCtr="0">
+            <a:spAutoFit/>
+          </a:bodyPr>
+          <a:lstStyle/>
+          <a:p>
+            <a:pPr marL="0" marR="0" lvl="0" indent="0" algn="l" rtl="0">
+              <a:spcBef>
+                <a:spcPts val="0"/>
+              </a:spcBef>
+              <a:spcAft>
+                <a:spcPts val="0"/>
+              </a:spcAft>
+              <a:buNone/>
+            </a:pPr>
+            <a:r>
+              <a:rPr lang="uk-UA" sz="1800" b="1" dirty="0">
+                <a:solidFill>
+                  <a:srgbClr val="3B82F6"/>
+                </a:solidFill>
+                <a:cs typeface="Poppins"/>
+                <a:sym typeface="Poppins"/>
+              </a:rPr>
+              <a:t>Об’єкт дослідження</a:t>
+            </a:r>
+            <a:endParaRPr dirty="0"/>
+          </a:p>
+        </p:txBody>
+      </p:sp>
+      <p:sp>
+        <p:nvSpPr>
+          <p:cNvPr id="5" name="Google Shape;107;p15">
+            <a:extLst>
+              <a:ext uri="{FF2B5EF4-FFF2-40B4-BE49-F238E27FC236}">
+                <a16:creationId xmlns:a16="http://schemas.microsoft.com/office/drawing/2014/main" id="{302685E8-0DDF-602A-1392-5BEBFFBB6508}"/>
+              </a:ext>
+            </a:extLst>
+          </p:cNvPr>
+          <p:cNvSpPr txBox="1"/>
+          <p:nvPr/>
+        </p:nvSpPr>
+        <p:spPr>
+          <a:xfrm>
+            <a:off x="4557009" y="3100299"/>
+            <a:ext cx="2910954" cy="1206484"/>
+          </a:xfrm>
+          <a:prstGeom prst="rect">
+            <a:avLst/>
+          </a:prstGeom>
+          <a:noFill/>
+          <a:ln>
+            <a:noFill/>
+          </a:ln>
+        </p:spPr>
+        <p:txBody>
+          <a:bodyPr spcFirstLastPara="1" wrap="square" lIns="0" tIns="0" rIns="0" bIns="0" anchor="t" anchorCtr="0">
+            <a:spAutoFit/>
+          </a:bodyPr>
+          <a:lstStyle/>
+          <a:p>
+            <a:pPr lvl="0">
+              <a:lnSpc>
+                <a:spcPct val="139925"/>
+              </a:lnSpc>
+            </a:pPr>
+            <a:r>
+              <a:rPr lang="uk-UA" sz="1350" dirty="0">
+                <a:solidFill>
+                  <a:srgbClr val="CBD5E1"/>
+                </a:solidFill>
+                <a:latin typeface="Inter" panose="020B0604020202020204" charset="0"/>
+                <a:ea typeface="Inter" panose="020B0604020202020204" charset="0"/>
+              </a:rPr>
+              <a:t>П</a:t>
+            </a:r>
+            <a:r>
+              <a:rPr lang="ru-RU" sz="1350" dirty="0" err="1">
+                <a:solidFill>
+                  <a:srgbClr val="CBD5E1"/>
+                </a:solidFill>
+                <a:latin typeface="Inter" panose="020B0604020202020204" charset="0"/>
+                <a:ea typeface="Inter" panose="020B0604020202020204" charset="0"/>
+              </a:rPr>
+              <a:t>роцес</a:t>
+            </a:r>
+            <a:r>
+              <a:rPr lang="ru-RU" sz="1350" dirty="0">
+                <a:solidFill>
+                  <a:srgbClr val="CBD5E1"/>
+                </a:solidFill>
+                <a:latin typeface="Inter" panose="020B0604020202020204" charset="0"/>
+                <a:ea typeface="Inter" panose="020B0604020202020204" charset="0"/>
+              </a:rPr>
+              <a:t> </a:t>
+            </a:r>
+            <a:r>
+              <a:rPr lang="ru-RU" sz="1350" dirty="0" err="1">
+                <a:solidFill>
+                  <a:srgbClr val="CBD5E1"/>
+                </a:solidFill>
+                <a:latin typeface="Inter" panose="020B0604020202020204" charset="0"/>
+                <a:ea typeface="Inter" panose="020B0604020202020204" charset="0"/>
+              </a:rPr>
+              <a:t>автоматизованого</a:t>
+            </a:r>
+            <a:r>
+              <a:rPr lang="ru-RU" sz="1350" dirty="0">
+                <a:solidFill>
+                  <a:srgbClr val="CBD5E1"/>
+                </a:solidFill>
+                <a:latin typeface="Inter" panose="020B0604020202020204" charset="0"/>
+                <a:ea typeface="Inter" panose="020B0604020202020204" charset="0"/>
+              </a:rPr>
+              <a:t> </a:t>
+            </a:r>
+            <a:r>
+              <a:rPr lang="ru-RU" sz="1350" dirty="0" err="1">
+                <a:solidFill>
+                  <a:srgbClr val="CBD5E1"/>
+                </a:solidFill>
+                <a:latin typeface="Inter" panose="020B0604020202020204" charset="0"/>
+                <a:ea typeface="Inter" panose="020B0604020202020204" charset="0"/>
+              </a:rPr>
+              <a:t>планування</a:t>
+            </a:r>
+            <a:r>
+              <a:rPr lang="ru-RU" sz="1350" dirty="0">
+                <a:solidFill>
+                  <a:srgbClr val="CBD5E1"/>
+                </a:solidFill>
+                <a:latin typeface="Inter" panose="020B0604020202020204" charset="0"/>
+                <a:ea typeface="Inter" panose="020B0604020202020204" charset="0"/>
+              </a:rPr>
+              <a:t> руху </a:t>
+            </a:r>
+            <a:r>
+              <a:rPr lang="ru-RU" sz="1350" dirty="0" err="1">
+                <a:solidFill>
+                  <a:srgbClr val="CBD5E1"/>
+                </a:solidFill>
+                <a:latin typeface="Inter" panose="020B0604020202020204" charset="0"/>
+                <a:ea typeface="Inter" panose="020B0604020202020204" charset="0"/>
+              </a:rPr>
+              <a:t>неігрових</a:t>
+            </a:r>
+            <a:r>
+              <a:rPr lang="ru-RU" sz="1350" dirty="0">
+                <a:solidFill>
+                  <a:srgbClr val="CBD5E1"/>
+                </a:solidFill>
+                <a:latin typeface="Inter" panose="020B0604020202020204" charset="0"/>
+                <a:ea typeface="Inter" panose="020B0604020202020204" charset="0"/>
+              </a:rPr>
+              <a:t> </a:t>
+            </a:r>
+            <a:r>
+              <a:rPr lang="ru-RU" sz="1350" dirty="0" err="1">
+                <a:solidFill>
+                  <a:srgbClr val="CBD5E1"/>
+                </a:solidFill>
+                <a:latin typeface="Inter" panose="020B0604020202020204" charset="0"/>
+                <a:ea typeface="Inter" panose="020B0604020202020204" charset="0"/>
+              </a:rPr>
+              <a:t>персонажів</a:t>
+            </a:r>
+            <a:r>
+              <a:rPr lang="ru-RU" sz="1350" dirty="0">
+                <a:solidFill>
+                  <a:srgbClr val="CBD5E1"/>
+                </a:solidFill>
+                <a:latin typeface="Inter" panose="020B0604020202020204" charset="0"/>
+                <a:ea typeface="Inter" panose="020B0604020202020204" charset="0"/>
+              </a:rPr>
+              <a:t> у </a:t>
+            </a:r>
+            <a:r>
+              <a:rPr lang="ru-RU" sz="1350" dirty="0" err="1">
+                <a:solidFill>
+                  <a:srgbClr val="CBD5E1"/>
+                </a:solidFill>
+                <a:latin typeface="Inter" panose="020B0604020202020204" charset="0"/>
+                <a:ea typeface="Inter" panose="020B0604020202020204" charset="0"/>
+              </a:rPr>
+              <a:t>дискретних</a:t>
+            </a:r>
+            <a:r>
+              <a:rPr lang="ru-RU" sz="1350" dirty="0">
+                <a:solidFill>
+                  <a:srgbClr val="CBD5E1"/>
+                </a:solidFill>
+                <a:latin typeface="Inter" panose="020B0604020202020204" charset="0"/>
+                <a:ea typeface="Inter" panose="020B0604020202020204" charset="0"/>
+              </a:rPr>
+              <a:t> </a:t>
+            </a:r>
+            <a:r>
+              <a:rPr lang="ru-RU" sz="1350" dirty="0" err="1">
+                <a:solidFill>
+                  <a:srgbClr val="CBD5E1"/>
+                </a:solidFill>
+                <a:latin typeface="Inter" panose="020B0604020202020204" charset="0"/>
+                <a:ea typeface="Inter" panose="020B0604020202020204" charset="0"/>
+              </a:rPr>
+              <a:t>тривимірних</a:t>
+            </a:r>
+            <a:r>
+              <a:rPr lang="ru-RU" sz="1350" dirty="0">
+                <a:solidFill>
+                  <a:srgbClr val="CBD5E1"/>
+                </a:solidFill>
+                <a:latin typeface="Inter" panose="020B0604020202020204" charset="0"/>
+                <a:ea typeface="Inter" panose="020B0604020202020204" charset="0"/>
+              </a:rPr>
+              <a:t> </a:t>
+            </a:r>
+            <a:r>
+              <a:rPr lang="ru-RU" sz="1350" dirty="0" err="1">
+                <a:solidFill>
+                  <a:srgbClr val="CBD5E1"/>
+                </a:solidFill>
+                <a:latin typeface="Inter" panose="020B0604020202020204" charset="0"/>
+                <a:ea typeface="Inter" panose="020B0604020202020204" charset="0"/>
+              </a:rPr>
+              <a:t>середовищах</a:t>
+            </a:r>
+            <a:endParaRPr sz="1350" dirty="0">
+              <a:solidFill>
+                <a:srgbClr val="CBD5E1"/>
+              </a:solidFill>
+              <a:latin typeface="Inter" panose="020B0604020202020204" charset="0"/>
+              <a:ea typeface="Inter" panose="020B0604020202020204" charset="0"/>
             </a:endParaRPr>
           </a:p>
         </p:txBody>
@@ -16816,18 +18310,390 @@
               <a:buNone/>
             </a:pPr>
             <a:r>
-              <a:rPr lang="en-US" sz="1350" b="0" i="0" u="none" strike="noStrike" cap="none">
-                <a:solidFill>
-                  <a:srgbClr val="CBD5E1"/>
-                </a:solidFill>
-                <a:latin typeface="Inter"/>
-                <a:ea typeface="Inter"/>
-                <a:cs typeface="Inter"/>
-                <a:sym typeface="Inter"/>
-              </a:rPr>
-              <a:t>Класичний A* не враховує інерцію. Використання iDb-A* дозволяє розширити простір станів, включивши вектор швидкості для фізичної досяжності.</a:t>
-            </a:r>
-            <a:endParaRPr/>
+              <a:rPr lang="en-US" sz="1350" b="0" i="0" u="none" strike="noStrike" cap="none" dirty="0" err="1">
+                <a:solidFill>
+                  <a:srgbClr val="CBD5E1"/>
+                </a:solidFill>
+                <a:latin typeface="Inter"/>
+                <a:ea typeface="Inter"/>
+                <a:cs typeface="Inter"/>
+                <a:sym typeface="Inter"/>
+              </a:rPr>
+              <a:t>Класичний</a:t>
+            </a:r>
+            <a:r>
+              <a:rPr lang="en-US" sz="1350" b="0" i="0" u="none" strike="noStrike" cap="none" dirty="0">
+                <a:solidFill>
+                  <a:srgbClr val="CBD5E1"/>
+                </a:solidFill>
+                <a:latin typeface="Inter"/>
+                <a:ea typeface="Inter"/>
+                <a:cs typeface="Inter"/>
+                <a:sym typeface="Inter"/>
+              </a:rPr>
+              <a:t> A* </a:t>
+            </a:r>
+            <a:r>
+              <a:rPr lang="en-US" sz="1350" b="0" i="0" u="none" strike="noStrike" cap="none" dirty="0" err="1">
+                <a:solidFill>
+                  <a:srgbClr val="CBD5E1"/>
+                </a:solidFill>
+                <a:latin typeface="Inter"/>
+                <a:ea typeface="Inter"/>
+                <a:cs typeface="Inter"/>
+                <a:sym typeface="Inter"/>
+              </a:rPr>
+              <a:t>не</a:t>
+            </a:r>
+            <a:r>
+              <a:rPr lang="en-US" sz="1350" b="0" i="0" u="none" strike="noStrike" cap="none" dirty="0">
+                <a:solidFill>
+                  <a:srgbClr val="CBD5E1"/>
+                </a:solidFill>
+                <a:latin typeface="Inter"/>
+                <a:ea typeface="Inter"/>
+                <a:cs typeface="Inter"/>
+                <a:sym typeface="Inter"/>
+              </a:rPr>
+              <a:t> </a:t>
+            </a:r>
+            <a:r>
+              <a:rPr lang="en-US" sz="1350" b="0" i="0" u="none" strike="noStrike" cap="none" dirty="0" err="1">
+                <a:solidFill>
+                  <a:srgbClr val="CBD5E1"/>
+                </a:solidFill>
+                <a:latin typeface="Inter"/>
+                <a:ea typeface="Inter"/>
+                <a:cs typeface="Inter"/>
+                <a:sym typeface="Inter"/>
+              </a:rPr>
+              <a:t>враховує</a:t>
+            </a:r>
+            <a:r>
+              <a:rPr lang="en-US" sz="1350" b="0" i="0" u="none" strike="noStrike" cap="none" dirty="0">
+                <a:solidFill>
+                  <a:srgbClr val="CBD5E1"/>
+                </a:solidFill>
+                <a:latin typeface="Inter"/>
+                <a:ea typeface="Inter"/>
+                <a:cs typeface="Inter"/>
+                <a:sym typeface="Inter"/>
+              </a:rPr>
+              <a:t> </a:t>
+            </a:r>
+            <a:r>
+              <a:rPr lang="en-US" sz="1350" b="0" i="0" u="none" strike="noStrike" cap="none" dirty="0" err="1">
+                <a:solidFill>
+                  <a:srgbClr val="CBD5E1"/>
+                </a:solidFill>
+                <a:latin typeface="Inter"/>
+                <a:ea typeface="Inter"/>
+                <a:cs typeface="Inter"/>
+                <a:sym typeface="Inter"/>
+              </a:rPr>
+              <a:t>інерцію</a:t>
+            </a:r>
+            <a:r>
+              <a:rPr lang="en-US" sz="1350" b="0" i="0" u="none" strike="noStrike" cap="none" dirty="0">
+                <a:solidFill>
+                  <a:srgbClr val="CBD5E1"/>
+                </a:solidFill>
+                <a:latin typeface="Inter"/>
+                <a:ea typeface="Inter"/>
+                <a:cs typeface="Inter"/>
+                <a:sym typeface="Inter"/>
+              </a:rPr>
+              <a:t>. </a:t>
+            </a:r>
+            <a:r>
+              <a:rPr lang="en-US" sz="1350" b="0" i="0" u="none" strike="noStrike" cap="none" dirty="0" err="1">
+                <a:solidFill>
+                  <a:srgbClr val="CBD5E1"/>
+                </a:solidFill>
+                <a:latin typeface="Inter"/>
+                <a:ea typeface="Inter"/>
+                <a:cs typeface="Inter"/>
+                <a:sym typeface="Inter"/>
+              </a:rPr>
+              <a:t>Використання</a:t>
+            </a:r>
+            <a:r>
+              <a:rPr lang="en-US" sz="1350" b="0" i="0" u="none" strike="noStrike" cap="none" dirty="0">
+                <a:solidFill>
+                  <a:srgbClr val="CBD5E1"/>
+                </a:solidFill>
+                <a:latin typeface="Inter"/>
+                <a:ea typeface="Inter"/>
+                <a:cs typeface="Inter"/>
+                <a:sym typeface="Inter"/>
+              </a:rPr>
+              <a:t> </a:t>
+            </a:r>
+            <a:r>
+              <a:rPr lang="en-US" sz="1350" b="0" i="0" u="none" strike="noStrike" cap="none" dirty="0" err="1">
+                <a:solidFill>
+                  <a:srgbClr val="CBD5E1"/>
+                </a:solidFill>
+                <a:latin typeface="Inter"/>
+                <a:ea typeface="Inter"/>
+                <a:cs typeface="Inter"/>
+                <a:sym typeface="Inter"/>
+              </a:rPr>
+              <a:t>iDb</a:t>
+            </a:r>
+            <a:r>
+              <a:rPr lang="en-US" sz="1350" b="0" i="0" u="none" strike="noStrike" cap="none" dirty="0">
+                <a:solidFill>
+                  <a:srgbClr val="CBD5E1"/>
+                </a:solidFill>
+                <a:latin typeface="Inter"/>
+                <a:ea typeface="Inter"/>
+                <a:cs typeface="Inter"/>
+                <a:sym typeface="Inter"/>
+              </a:rPr>
+              <a:t>-A* </a:t>
+            </a:r>
+            <a:r>
+              <a:rPr lang="en-US" sz="1350" b="0" i="0" u="none" strike="noStrike" cap="none" dirty="0" err="1">
+                <a:solidFill>
+                  <a:srgbClr val="CBD5E1"/>
+                </a:solidFill>
+                <a:latin typeface="Inter"/>
+                <a:ea typeface="Inter"/>
+                <a:cs typeface="Inter"/>
+                <a:sym typeface="Inter"/>
+              </a:rPr>
+              <a:t>дозволяє</a:t>
+            </a:r>
+            <a:r>
+              <a:rPr lang="en-US" sz="1350" b="0" i="0" u="none" strike="noStrike" cap="none" dirty="0">
+                <a:solidFill>
+                  <a:srgbClr val="CBD5E1"/>
+                </a:solidFill>
+                <a:latin typeface="Inter"/>
+                <a:ea typeface="Inter"/>
+                <a:cs typeface="Inter"/>
+                <a:sym typeface="Inter"/>
+              </a:rPr>
+              <a:t> </a:t>
+            </a:r>
+            <a:r>
+              <a:rPr lang="en-US" sz="1350" b="0" i="0" u="none" strike="noStrike" cap="none" dirty="0" err="1">
+                <a:solidFill>
+                  <a:srgbClr val="CBD5E1"/>
+                </a:solidFill>
+                <a:latin typeface="Inter"/>
+                <a:ea typeface="Inter"/>
+                <a:cs typeface="Inter"/>
+                <a:sym typeface="Inter"/>
+              </a:rPr>
+              <a:t>розширити</a:t>
+            </a:r>
+            <a:r>
+              <a:rPr lang="en-US" sz="1350" b="0" i="0" u="none" strike="noStrike" cap="none" dirty="0">
+                <a:solidFill>
+                  <a:srgbClr val="CBD5E1"/>
+                </a:solidFill>
+                <a:latin typeface="Inter"/>
+                <a:ea typeface="Inter"/>
+                <a:cs typeface="Inter"/>
+                <a:sym typeface="Inter"/>
+              </a:rPr>
+              <a:t> </a:t>
+            </a:r>
+            <a:r>
+              <a:rPr lang="en-US" sz="1350" b="0" i="0" u="none" strike="noStrike" cap="none" dirty="0" err="1">
+                <a:solidFill>
+                  <a:srgbClr val="CBD5E1"/>
+                </a:solidFill>
+                <a:latin typeface="Inter"/>
+                <a:ea typeface="Inter"/>
+                <a:cs typeface="Inter"/>
+                <a:sym typeface="Inter"/>
+              </a:rPr>
+              <a:t>простір</a:t>
+            </a:r>
+            <a:r>
+              <a:rPr lang="en-US" sz="1350" b="0" i="0" u="none" strike="noStrike" cap="none" dirty="0">
+                <a:solidFill>
+                  <a:srgbClr val="CBD5E1"/>
+                </a:solidFill>
+                <a:latin typeface="Inter"/>
+                <a:ea typeface="Inter"/>
+                <a:cs typeface="Inter"/>
+                <a:sym typeface="Inter"/>
+              </a:rPr>
+              <a:t> </a:t>
+            </a:r>
+            <a:r>
+              <a:rPr lang="en-US" sz="1350" b="0" i="0" u="none" strike="noStrike" cap="none" dirty="0" err="1">
+                <a:solidFill>
+                  <a:srgbClr val="CBD5E1"/>
+                </a:solidFill>
+                <a:latin typeface="Inter"/>
+                <a:ea typeface="Inter"/>
+                <a:cs typeface="Inter"/>
+                <a:sym typeface="Inter"/>
+              </a:rPr>
+              <a:t>станів</a:t>
+            </a:r>
+            <a:r>
+              <a:rPr lang="en-US" sz="1350" b="0" i="0" u="none" strike="noStrike" cap="none" dirty="0">
+                <a:solidFill>
+                  <a:srgbClr val="CBD5E1"/>
+                </a:solidFill>
+                <a:latin typeface="Inter"/>
+                <a:ea typeface="Inter"/>
+                <a:cs typeface="Inter"/>
+                <a:sym typeface="Inter"/>
+              </a:rPr>
+              <a:t>, </a:t>
+            </a:r>
+            <a:r>
+              <a:rPr lang="en-US" sz="1350" b="0" i="0" u="none" strike="noStrike" cap="none" dirty="0" err="1">
+                <a:solidFill>
+                  <a:srgbClr val="CBD5E1"/>
+                </a:solidFill>
+                <a:latin typeface="Inter"/>
+                <a:ea typeface="Inter"/>
+                <a:cs typeface="Inter"/>
+                <a:sym typeface="Inter"/>
+              </a:rPr>
+              <a:t>включивши</a:t>
+            </a:r>
+            <a:r>
+              <a:rPr lang="en-US" sz="1350" b="0" i="0" u="none" strike="noStrike" cap="none" dirty="0">
+                <a:solidFill>
+                  <a:srgbClr val="CBD5E1"/>
+                </a:solidFill>
+                <a:latin typeface="Inter"/>
+                <a:ea typeface="Inter"/>
+                <a:cs typeface="Inter"/>
+                <a:sym typeface="Inter"/>
+              </a:rPr>
+              <a:t> </a:t>
+            </a:r>
+            <a:r>
+              <a:rPr lang="en-US" sz="1350" b="0" i="0" u="none" strike="noStrike" cap="none" dirty="0" err="1">
+                <a:solidFill>
+                  <a:srgbClr val="CBD5E1"/>
+                </a:solidFill>
+                <a:latin typeface="Inter"/>
+                <a:ea typeface="Inter"/>
+                <a:cs typeface="Inter"/>
+                <a:sym typeface="Inter"/>
+              </a:rPr>
+              <a:t>вектор</a:t>
+            </a:r>
+            <a:r>
+              <a:rPr lang="en-US" sz="1350" b="0" i="0" u="none" strike="noStrike" cap="none" dirty="0">
+                <a:solidFill>
+                  <a:srgbClr val="CBD5E1"/>
+                </a:solidFill>
+                <a:latin typeface="Inter"/>
+                <a:ea typeface="Inter"/>
+                <a:cs typeface="Inter"/>
+                <a:sym typeface="Inter"/>
+              </a:rPr>
+              <a:t> </a:t>
+            </a:r>
+            <a:r>
+              <a:rPr lang="en-US" sz="1350" b="0" i="0" u="none" strike="noStrike" cap="none" dirty="0" err="1">
+                <a:solidFill>
+                  <a:srgbClr val="CBD5E1"/>
+                </a:solidFill>
+                <a:latin typeface="Inter"/>
+                <a:ea typeface="Inter"/>
+                <a:cs typeface="Inter"/>
+                <a:sym typeface="Inter"/>
+              </a:rPr>
+              <a:t>швидкості</a:t>
+            </a:r>
+            <a:r>
+              <a:rPr lang="en-US" sz="1350" b="0" i="0" u="none" strike="noStrike" cap="none" dirty="0">
+                <a:solidFill>
+                  <a:srgbClr val="CBD5E1"/>
+                </a:solidFill>
+                <a:latin typeface="Inter"/>
+                <a:ea typeface="Inter"/>
+                <a:cs typeface="Inter"/>
+                <a:sym typeface="Inter"/>
+              </a:rPr>
+              <a:t> </a:t>
+            </a:r>
+            <a:r>
+              <a:rPr lang="en-US" sz="1350" b="0" i="0" u="none" strike="noStrike" cap="none" dirty="0" err="1">
+                <a:solidFill>
+                  <a:srgbClr val="CBD5E1"/>
+                </a:solidFill>
+                <a:latin typeface="Inter"/>
+                <a:ea typeface="Inter"/>
+                <a:cs typeface="Inter"/>
+                <a:sym typeface="Inter"/>
+              </a:rPr>
+              <a:t>для</a:t>
+            </a:r>
+            <a:r>
+              <a:rPr lang="en-US" sz="1350" b="0" i="0" u="none" strike="noStrike" cap="none" dirty="0">
+                <a:solidFill>
+                  <a:srgbClr val="CBD5E1"/>
+                </a:solidFill>
+                <a:latin typeface="Inter"/>
+                <a:ea typeface="Inter"/>
+                <a:cs typeface="Inter"/>
+                <a:sym typeface="Inter"/>
+              </a:rPr>
+              <a:t> </a:t>
+            </a:r>
+            <a:r>
+              <a:rPr lang="en-US" sz="1350" b="0" i="0" u="none" strike="noStrike" cap="none" dirty="0" err="1">
+                <a:solidFill>
+                  <a:srgbClr val="CBD5E1"/>
+                </a:solidFill>
+                <a:latin typeface="Inter"/>
+                <a:ea typeface="Inter"/>
+                <a:cs typeface="Inter"/>
+                <a:sym typeface="Inter"/>
+              </a:rPr>
+              <a:t>фізичної</a:t>
+            </a:r>
+            <a:r>
+              <a:rPr lang="en-US" sz="1350" b="0" i="0" u="none" strike="noStrike" cap="none" dirty="0">
+                <a:solidFill>
+                  <a:srgbClr val="CBD5E1"/>
+                </a:solidFill>
+                <a:latin typeface="Inter"/>
+                <a:ea typeface="Inter"/>
+                <a:cs typeface="Inter"/>
+                <a:sym typeface="Inter"/>
+              </a:rPr>
+              <a:t> </a:t>
+            </a:r>
+            <a:r>
+              <a:rPr lang="en-US" sz="1350" b="0" i="0" u="none" strike="noStrike" cap="none" dirty="0" err="1">
+                <a:solidFill>
+                  <a:srgbClr val="CBD5E1"/>
+                </a:solidFill>
+                <a:latin typeface="Inter"/>
+                <a:ea typeface="Inter"/>
+                <a:cs typeface="Inter"/>
+                <a:sym typeface="Inter"/>
+              </a:rPr>
+              <a:t>досяжності</a:t>
+            </a:r>
+            <a:r>
+              <a:rPr lang="en-US" sz="1350" b="0" i="0" u="none" strike="noStrike" cap="none" dirty="0">
+                <a:solidFill>
+                  <a:srgbClr val="CBD5E1"/>
+                </a:solidFill>
+                <a:latin typeface="Inter"/>
+                <a:ea typeface="Inter"/>
+                <a:cs typeface="Inter"/>
+                <a:sym typeface="Inter"/>
+              </a:rPr>
+              <a:t>.</a:t>
+            </a:r>
+            <a:endParaRPr dirty="0"/>
           </a:p>
         </p:txBody>
       </p:sp>
@@ -18345,33 +20211,6 @@
           </a:ln>
         </p:spPr>
       </p:pic>
-      <p:pic>
-        <p:nvPicPr>
-          <p:cNvPr id="152" name="Google Shape;152;p18" descr="image.png"/>
-          <p:cNvPicPr preferRelativeResize="0"/>
-          <p:nvPr/>
-        </p:nvPicPr>
-        <p:blipFill rotWithShape="1">
-          <a:blip r:embed="rId4">
-            <a:alphaModFix/>
-          </a:blip>
-          <a:srcRect/>
-          <a:stretch/>
-        </p:blipFill>
-        <p:spPr>
-          <a:xfrm>
-            <a:off x="581025" y="1409700"/>
-            <a:ext cx="11029950" cy="4867275"/>
-          </a:xfrm>
-          <a:prstGeom prst="rect">
-            <a:avLst/>
-          </a:prstGeom>
-          <a:noFill/>
-          <a:ln>
-            <a:noFill/>
-          </a:ln>
-        </p:spPr>
-      </p:pic>
       <p:sp>
         <p:nvSpPr>
           <p:cNvPr id="153" name="Google Shape;153;p18"/>
@@ -18381,7 +20220,7 @@
         <p:spPr>
           <a:xfrm>
             <a:off x="581025" y="2508051"/>
-            <a:ext cx="11029950" cy="239910"/>
+            <a:ext cx="11029950" cy="290849"/>
           </a:xfrm>
           <a:prstGeom prst="rect">
             <a:avLst/>
@@ -18410,18 +20249,174 @@
               <a:buNone/>
             </a:pPr>
             <a:r>
-              <a:rPr lang="en-US" sz="1350" b="0" i="0" u="none" strike="noStrike" cap="none">
-                <a:solidFill>
-                  <a:srgbClr val="CBD5E1"/>
-                </a:solidFill>
-                <a:latin typeface="Inter"/>
-                <a:ea typeface="Inter"/>
-                <a:cs typeface="Inter"/>
-                <a:sym typeface="Inter"/>
-              </a:rPr>
-              <a:t>Багатокритеріальний аналіз (ваги: безпека 0.35, адаптивність 0.25, швидкість 0.20)</a:t>
-            </a:r>
-            <a:endParaRPr/>
+              <a:rPr lang="en-US" sz="1350" b="0" i="0" u="none" strike="noStrike" cap="none" dirty="0" err="1">
+                <a:solidFill>
+                  <a:srgbClr val="CBD5E1"/>
+                </a:solidFill>
+                <a:latin typeface="Inter"/>
+                <a:ea typeface="Inter"/>
+                <a:cs typeface="Inter"/>
+                <a:sym typeface="Inter"/>
+              </a:rPr>
+              <a:t>Багатокритеріальний</a:t>
+            </a:r>
+            <a:r>
+              <a:rPr lang="en-US" sz="1350" b="0" i="0" u="none" strike="noStrike" cap="none" dirty="0">
+                <a:solidFill>
+                  <a:srgbClr val="CBD5E1"/>
+                </a:solidFill>
+                <a:latin typeface="Inter"/>
+                <a:ea typeface="Inter"/>
+                <a:cs typeface="Inter"/>
+                <a:sym typeface="Inter"/>
+              </a:rPr>
+              <a:t> </a:t>
+            </a:r>
+            <a:r>
+              <a:rPr lang="en-US" sz="1350" b="0" i="0" u="none" strike="noStrike" cap="none" dirty="0" err="1">
+                <a:solidFill>
+                  <a:srgbClr val="CBD5E1"/>
+                </a:solidFill>
+                <a:latin typeface="Inter"/>
+                <a:ea typeface="Inter"/>
+                <a:cs typeface="Inter"/>
+                <a:sym typeface="Inter"/>
+              </a:rPr>
+              <a:t>аналіз</a:t>
+            </a:r>
+            <a:r>
+              <a:rPr lang="en-US" sz="1350" b="0" i="0" u="none" strike="noStrike" cap="none" dirty="0">
+                <a:solidFill>
+                  <a:srgbClr val="CBD5E1"/>
+                </a:solidFill>
+                <a:latin typeface="Inter"/>
+                <a:ea typeface="Inter"/>
+                <a:cs typeface="Inter"/>
+                <a:sym typeface="Inter"/>
+              </a:rPr>
+              <a:t> (</a:t>
+            </a:r>
+            <a:r>
+              <a:rPr lang="en-US" sz="1350" b="0" i="0" u="none" strike="noStrike" cap="none" dirty="0" err="1">
+                <a:solidFill>
+                  <a:srgbClr val="CBD5E1"/>
+                </a:solidFill>
+                <a:latin typeface="Inter"/>
+                <a:ea typeface="Inter"/>
+                <a:cs typeface="Inter"/>
+                <a:sym typeface="Inter"/>
+              </a:rPr>
+              <a:t>ваги</a:t>
+            </a:r>
+            <a:r>
+              <a:rPr lang="en-US" sz="1350" b="0" i="0" u="none" strike="noStrike" cap="none" dirty="0">
+                <a:solidFill>
+                  <a:srgbClr val="CBD5E1"/>
+                </a:solidFill>
+                <a:latin typeface="Inter"/>
+                <a:ea typeface="Inter"/>
+                <a:cs typeface="Inter"/>
+                <a:sym typeface="Inter"/>
+              </a:rPr>
+              <a:t>: </a:t>
+            </a:r>
+            <a:r>
+              <a:rPr lang="en-US" sz="1350" b="0" i="0" u="none" strike="noStrike" cap="none" dirty="0" err="1">
+                <a:solidFill>
+                  <a:srgbClr val="CBD5E1"/>
+                </a:solidFill>
+                <a:latin typeface="Inter"/>
+                <a:ea typeface="Inter"/>
+                <a:cs typeface="Inter"/>
+                <a:sym typeface="Inter"/>
+              </a:rPr>
+              <a:t>безпека</a:t>
+            </a:r>
+            <a:r>
+              <a:rPr lang="en-US" sz="1350" b="0" i="0" u="none" strike="noStrike" cap="none" dirty="0">
+                <a:solidFill>
+                  <a:srgbClr val="CBD5E1"/>
+                </a:solidFill>
+                <a:latin typeface="Inter"/>
+                <a:ea typeface="Inter"/>
+                <a:cs typeface="Inter"/>
+                <a:sym typeface="Inter"/>
+              </a:rPr>
+              <a:t> 0.35, </a:t>
+            </a:r>
+            <a:r>
+              <a:rPr lang="en-US" sz="1350" b="0" i="0" u="none" strike="noStrike" cap="none" dirty="0" err="1">
+                <a:solidFill>
+                  <a:srgbClr val="CBD5E1"/>
+                </a:solidFill>
+                <a:latin typeface="Inter"/>
+                <a:ea typeface="Inter"/>
+                <a:cs typeface="Inter"/>
+                <a:sym typeface="Inter"/>
+              </a:rPr>
+              <a:t>адаптивність</a:t>
+            </a:r>
+            <a:r>
+              <a:rPr lang="en-US" sz="1350" b="0" i="0" u="none" strike="noStrike" cap="none" dirty="0">
+                <a:solidFill>
+                  <a:srgbClr val="CBD5E1"/>
+                </a:solidFill>
+                <a:latin typeface="Inter"/>
+                <a:ea typeface="Inter"/>
+                <a:cs typeface="Inter"/>
+                <a:sym typeface="Inter"/>
+              </a:rPr>
+              <a:t> 0.25, </a:t>
+            </a:r>
+            <a:r>
+              <a:rPr lang="en-US" sz="1350" b="0" i="0" u="none" strike="noStrike" cap="none" dirty="0" err="1">
+                <a:solidFill>
+                  <a:srgbClr val="CBD5E1"/>
+                </a:solidFill>
+                <a:latin typeface="Inter"/>
+                <a:ea typeface="Inter"/>
+                <a:cs typeface="Inter"/>
+                <a:sym typeface="Inter"/>
+              </a:rPr>
+              <a:t>швидкість</a:t>
+            </a:r>
+            <a:r>
+              <a:rPr lang="en-US" sz="1350" b="0" i="0" u="none" strike="noStrike" cap="none" dirty="0">
+                <a:solidFill>
+                  <a:srgbClr val="CBD5E1"/>
+                </a:solidFill>
+                <a:latin typeface="Inter"/>
+                <a:ea typeface="Inter"/>
+                <a:cs typeface="Inter"/>
+                <a:sym typeface="Inter"/>
+              </a:rPr>
+              <a:t> 0.20</a:t>
+            </a:r>
+            <a:r>
+              <a:rPr lang="uk-UA" sz="1350" dirty="0">
+                <a:solidFill>
+                  <a:srgbClr val="CBD5E1"/>
+                </a:solidFill>
+                <a:latin typeface="Inter"/>
+                <a:ea typeface="Inter"/>
+                <a:cs typeface="Inter"/>
+                <a:sym typeface="Inter"/>
+              </a:rPr>
+              <a:t>, пам’ять 0.20</a:t>
+            </a:r>
+            <a:r>
+              <a:rPr lang="en-US" sz="1350" b="0" i="0" u="none" strike="noStrike" cap="none" dirty="0">
+                <a:solidFill>
+                  <a:srgbClr val="CBD5E1"/>
+                </a:solidFill>
+                <a:latin typeface="Inter"/>
+                <a:ea typeface="Inter"/>
+                <a:cs typeface="Inter"/>
+                <a:sym typeface="Inter"/>
+              </a:rPr>
+              <a:t>)</a:t>
+            </a:r>
+            <a:endParaRPr dirty="0"/>
           </a:p>
         </p:txBody>
       </p:sp>
@@ -18433,7 +20428,7 @@
         </p:nvSpPr>
         <p:spPr>
           <a:xfrm>
-            <a:off x="581025" y="4938712"/>
+            <a:off x="581025" y="5302875"/>
             <a:ext cx="11029950" cy="290849"/>
           </a:xfrm>
           <a:prstGeom prst="rect">
@@ -18722,6 +20717,34 @@
           </a:p>
         </p:txBody>
       </p:sp>
+      <p:graphicFrame>
+        <p:nvGraphicFramePr>
+          <p:cNvPr id="5" name="Chart 4">
+            <a:extLst>
+              <a:ext uri="{FF2B5EF4-FFF2-40B4-BE49-F238E27FC236}">
+                <a16:creationId xmlns:a16="http://schemas.microsoft.com/office/drawing/2014/main" id="{278BAED6-0345-1D6D-05EB-7E45ACF4FFDA}"/>
+              </a:ext>
+            </a:extLst>
+          </p:cNvPr>
+          <p:cNvGraphicFramePr/>
+          <p:nvPr>
+            <p:extLst>
+              <p:ext uri="{D42A27DB-BD31-4B8C-83A1-F6EECF244321}">
+                <p14:modId xmlns:p14="http://schemas.microsoft.com/office/powerpoint/2010/main" val="548165081"/>
+              </p:ext>
+            </p:extLst>
+          </p:nvPr>
+        </p:nvGraphicFramePr>
+        <p:xfrm>
+          <a:off x="1085003" y="2867602"/>
+          <a:ext cx="7301546" cy="2382997"/>
+        </p:xfrm>
+        <a:graphic>
+          <a:graphicData uri="http://schemas.openxmlformats.org/drawingml/2006/chart">
+            <c:chart xmlns:c="http://schemas.openxmlformats.org/drawingml/2006/chart" xmlns:r="http://schemas.openxmlformats.org/officeDocument/2006/relationships" r:id="rId4"/>
+          </a:graphicData>
+        </a:graphic>
+      </p:graphicFrame>
     </p:spTree>
   </p:cSld>
   <p:clrMapOvr>
@@ -18731,919 +20754,6 @@
 </file>
 
 <file path=ppt/slides/slide6.xml><?xml version="1.0" encoding="utf-8"?>
-<p:sld xmlns:a="http://schemas.openxmlformats.org/drawingml/2006/main" xmlns:r="http://schemas.openxmlformats.org/officeDocument/2006/relationships" xmlns:p="http://schemas.openxmlformats.org/presentationml/2006/main">
-  <p:cSld>
-    <p:bg>
-      <p:bgPr>
-        <a:solidFill>
-          <a:srgbClr val="0F172A"/>
-        </a:solidFill>
-        <a:effectLst/>
-      </p:bgPr>
-    </p:bg>
-    <p:spTree>
-      <p:nvGrpSpPr>
-        <p:cNvPr id="1" name="Shape 160"/>
-        <p:cNvGrpSpPr/>
-        <p:nvPr/>
-      </p:nvGrpSpPr>
-      <p:grpSpPr>
-        <a:xfrm>
-          <a:off x="0" y="0"/>
-          <a:ext cx="0" cy="0"/>
-          <a:chOff x="0" y="0"/>
-          <a:chExt cx="0" cy="0"/>
-        </a:xfrm>
-      </p:grpSpPr>
-      <p:pic>
-        <p:nvPicPr>
-          <p:cNvPr id="161" name="Google Shape;161;p19" descr="image.png"/>
-          <p:cNvPicPr preferRelativeResize="0"/>
-          <p:nvPr/>
-        </p:nvPicPr>
-        <p:blipFill rotWithShape="1">
-          <a:blip r:embed="rId3">
-            <a:alphaModFix/>
-          </a:blip>
-          <a:srcRect/>
-          <a:stretch/>
-        </p:blipFill>
-        <p:spPr>
-          <a:xfrm>
-            <a:off x="0" y="0"/>
-            <a:ext cx="12192000" cy="6858000"/>
-          </a:xfrm>
-          <a:prstGeom prst="rect">
-            <a:avLst/>
-          </a:prstGeom>
-          <a:noFill/>
-          <a:ln>
-            <a:noFill/>
-          </a:ln>
-        </p:spPr>
-      </p:pic>
-      <p:sp>
-        <p:nvSpPr>
-          <p:cNvPr id="163" name="Google Shape;163;p19"/>
-          <p:cNvSpPr txBox="1"/>
-          <p:nvPr/>
-        </p:nvSpPr>
-        <p:spPr>
-          <a:xfrm>
-            <a:off x="581025" y="4293096"/>
-            <a:ext cx="3693742" cy="276225"/>
-          </a:xfrm>
-          <a:prstGeom prst="rect">
-            <a:avLst/>
-          </a:prstGeom>
-          <a:noFill/>
-          <a:ln>
-            <a:noFill/>
-          </a:ln>
-        </p:spPr>
-        <p:txBody>
-          <a:bodyPr spcFirstLastPara="1" wrap="square" lIns="0" tIns="0" rIns="0" bIns="0" anchor="t" anchorCtr="0">
-            <a:spAutoFit/>
-          </a:bodyPr>
-          <a:lstStyle/>
-          <a:p>
-            <a:pPr marL="0" marR="0" lvl="0" indent="0" algn="l" rtl="0">
-              <a:spcBef>
-                <a:spcPts val="0"/>
-              </a:spcBef>
-              <a:spcAft>
-                <a:spcPts val="0"/>
-              </a:spcAft>
-              <a:buNone/>
-            </a:pPr>
-            <a:r>
-              <a:rPr lang="en-US" sz="1404" b="1" i="0" u="none" strike="noStrike" cap="none">
-                <a:solidFill>
-                  <a:srgbClr val="F1F5F9"/>
-                </a:solidFill>
-                <a:latin typeface="Poppins"/>
-                <a:ea typeface="Poppins"/>
-                <a:cs typeface="Poppins"/>
-                <a:sym typeface="Poppins"/>
-              </a:rPr>
-              <a:t>SceneVoxelizer</a:t>
-            </a:r>
-            <a:endParaRPr/>
-          </a:p>
-        </p:txBody>
-      </p:sp>
-      <p:sp>
-        <p:nvSpPr>
-          <p:cNvPr id="164" name="Google Shape;164;p19"/>
-          <p:cNvSpPr txBox="1"/>
-          <p:nvPr/>
-        </p:nvSpPr>
-        <p:spPr>
-          <a:xfrm>
-            <a:off x="581025" y="4740771"/>
-            <a:ext cx="3517850" cy="872547"/>
-          </a:xfrm>
-          <a:prstGeom prst="rect">
-            <a:avLst/>
-          </a:prstGeom>
-          <a:noFill/>
-          <a:ln>
-            <a:noFill/>
-          </a:ln>
-        </p:spPr>
-        <p:txBody>
-          <a:bodyPr spcFirstLastPara="1" wrap="square" lIns="0" tIns="0" rIns="0" bIns="0" anchor="t" anchorCtr="0">
-            <a:spAutoFit/>
-          </a:bodyPr>
-          <a:lstStyle/>
-          <a:p>
-            <a:pPr marL="0" marR="0" lvl="0" indent="0" algn="l" rtl="0">
-              <a:lnSpc>
-                <a:spcPct val="139925"/>
-              </a:lnSpc>
-              <a:spcBef>
-                <a:spcPts val="0"/>
-              </a:spcBef>
-              <a:spcAft>
-                <a:spcPts val="0"/>
-              </a:spcAft>
-              <a:buNone/>
-            </a:pPr>
-            <a:r>
-              <a:rPr lang="en-US" sz="1350" b="0" i="0" u="none" strike="noStrike" cap="none" dirty="0" err="1">
-                <a:solidFill>
-                  <a:srgbClr val="CBD5E1"/>
-                </a:solidFill>
-                <a:latin typeface="Inter"/>
-                <a:ea typeface="Inter"/>
-                <a:cs typeface="Inter"/>
-                <a:sym typeface="Inter"/>
-              </a:rPr>
-              <a:t>Будує</a:t>
-            </a:r>
-            <a:r>
-              <a:rPr lang="en-US" sz="1350" b="0" i="0" u="none" strike="noStrike" cap="none" dirty="0">
-                <a:solidFill>
-                  <a:srgbClr val="CBD5E1"/>
-                </a:solidFill>
-                <a:latin typeface="Inter"/>
-                <a:ea typeface="Inter"/>
-                <a:cs typeface="Inter"/>
-                <a:sym typeface="Inter"/>
-              </a:rPr>
-              <a:t> SVO </a:t>
-            </a:r>
-            <a:r>
-              <a:rPr lang="en-US" sz="1350" b="0" i="0" u="none" strike="noStrike" cap="none" dirty="0" err="1">
-                <a:solidFill>
-                  <a:srgbClr val="CBD5E1"/>
-                </a:solidFill>
-                <a:latin typeface="Inter"/>
-                <a:ea typeface="Inter"/>
-                <a:cs typeface="Inter"/>
-                <a:sym typeface="Inter"/>
-              </a:rPr>
-              <a:t>октодерево</a:t>
-            </a:r>
-            <a:r>
-              <a:rPr lang="en-US" sz="1350" b="0" i="0" u="none" strike="noStrike" cap="none" dirty="0">
-                <a:solidFill>
-                  <a:srgbClr val="CBD5E1"/>
-                </a:solidFill>
-                <a:latin typeface="Inter"/>
-                <a:ea typeface="Inter"/>
-                <a:cs typeface="Inter"/>
-                <a:sym typeface="Inter"/>
-              </a:rPr>
-              <a:t>. </a:t>
-            </a:r>
-            <a:r>
-              <a:rPr lang="en-US" sz="1350" b="0" i="0" u="none" strike="noStrike" cap="none" dirty="0" err="1">
-                <a:solidFill>
-                  <a:srgbClr val="CBD5E1"/>
-                </a:solidFill>
-                <a:latin typeface="Inter"/>
-                <a:ea typeface="Inter"/>
-                <a:cs typeface="Inter"/>
-                <a:sym typeface="Inter"/>
-              </a:rPr>
-              <a:t>Класифікує</a:t>
-            </a:r>
-            <a:r>
-              <a:rPr lang="en-US" sz="1350" b="0" i="0" u="none" strike="noStrike" cap="none" dirty="0">
-                <a:solidFill>
-                  <a:srgbClr val="CBD5E1"/>
-                </a:solidFill>
-                <a:latin typeface="Inter"/>
-                <a:ea typeface="Inter"/>
-                <a:cs typeface="Inter"/>
-                <a:sym typeface="Inter"/>
-              </a:rPr>
-              <a:t> </a:t>
-            </a:r>
-            <a:r>
-              <a:rPr lang="en-US" sz="1350" b="0" i="0" u="none" strike="noStrike" cap="none" dirty="0" err="1">
-                <a:solidFill>
-                  <a:srgbClr val="CBD5E1"/>
-                </a:solidFill>
-                <a:latin typeface="Inter"/>
-                <a:ea typeface="Inter"/>
-                <a:cs typeface="Inter"/>
-                <a:sym typeface="Inter"/>
-              </a:rPr>
-              <a:t>прохідні</a:t>
-            </a:r>
-            <a:r>
-              <a:rPr lang="en-US" sz="1350" b="0" i="0" u="none" strike="noStrike" cap="none" dirty="0">
-                <a:solidFill>
-                  <a:srgbClr val="CBD5E1"/>
-                </a:solidFill>
-                <a:latin typeface="Inter"/>
-                <a:ea typeface="Inter"/>
-                <a:cs typeface="Inter"/>
-                <a:sym typeface="Inter"/>
-              </a:rPr>
-              <a:t> </a:t>
-            </a:r>
-            <a:r>
-              <a:rPr lang="en-US" sz="1350" b="0" i="0" u="none" strike="noStrike" cap="none" dirty="0" err="1">
-                <a:solidFill>
-                  <a:srgbClr val="CBD5E1"/>
-                </a:solidFill>
-                <a:latin typeface="Inter"/>
-                <a:ea typeface="Inter"/>
-                <a:cs typeface="Inter"/>
-                <a:sym typeface="Inter"/>
-              </a:rPr>
-              <a:t>вокселі</a:t>
-            </a:r>
-            <a:r>
-              <a:rPr lang="en-US" sz="1350" b="0" i="0" u="none" strike="noStrike" cap="none" dirty="0">
-                <a:solidFill>
-                  <a:srgbClr val="CBD5E1"/>
-                </a:solidFill>
-                <a:latin typeface="Inter"/>
-                <a:ea typeface="Inter"/>
-                <a:cs typeface="Inter"/>
-                <a:sym typeface="Inter"/>
-              </a:rPr>
-              <a:t> </a:t>
-            </a:r>
-            <a:r>
-              <a:rPr lang="en-US" sz="1350" b="0" i="0" u="none" strike="noStrike" cap="none" dirty="0" err="1">
-                <a:solidFill>
-                  <a:srgbClr val="CBD5E1"/>
-                </a:solidFill>
-                <a:latin typeface="Inter"/>
-                <a:ea typeface="Inter"/>
-                <a:cs typeface="Inter"/>
-                <a:sym typeface="Inter"/>
-              </a:rPr>
-              <a:t>за</a:t>
-            </a:r>
-            <a:r>
-              <a:rPr lang="en-US" sz="1350" b="0" i="0" u="none" strike="noStrike" cap="none" dirty="0">
-                <a:solidFill>
-                  <a:srgbClr val="CBD5E1"/>
-                </a:solidFill>
-                <a:latin typeface="Inter"/>
-                <a:ea typeface="Inter"/>
-                <a:cs typeface="Inter"/>
-                <a:sym typeface="Inter"/>
-              </a:rPr>
-              <a:t> </a:t>
-            </a:r>
-            <a:r>
-              <a:rPr lang="en-US" sz="1350" b="0" i="0" u="none" strike="noStrike" cap="none" dirty="0" err="1">
-                <a:solidFill>
-                  <a:srgbClr val="CBD5E1"/>
-                </a:solidFill>
-                <a:latin typeface="Inter"/>
-                <a:ea typeface="Inter"/>
-                <a:cs typeface="Inter"/>
-                <a:sym typeface="Inter"/>
-              </a:rPr>
-              <a:t>кутом</a:t>
-            </a:r>
-            <a:r>
-              <a:rPr lang="en-US" sz="1350" b="0" i="0" u="none" strike="noStrike" cap="none" dirty="0">
-                <a:solidFill>
-                  <a:srgbClr val="CBD5E1"/>
-                </a:solidFill>
-                <a:latin typeface="Inter"/>
-                <a:ea typeface="Inter"/>
-                <a:cs typeface="Inter"/>
-                <a:sym typeface="Inter"/>
-              </a:rPr>
-              <a:t> </a:t>
-            </a:r>
-            <a:r>
-              <a:rPr lang="en-US" sz="1350" b="0" i="0" u="none" strike="noStrike" cap="none" dirty="0" err="1">
-                <a:solidFill>
-                  <a:srgbClr val="CBD5E1"/>
-                </a:solidFill>
-                <a:latin typeface="Inter"/>
-                <a:ea typeface="Inter"/>
-                <a:cs typeface="Inter"/>
-                <a:sym typeface="Inter"/>
-              </a:rPr>
-              <a:t>нахилу</a:t>
-            </a:r>
-            <a:r>
-              <a:rPr lang="en-US" sz="1350" b="0" i="0" u="none" strike="noStrike" cap="none" dirty="0">
-                <a:solidFill>
-                  <a:srgbClr val="CBD5E1"/>
-                </a:solidFill>
-                <a:latin typeface="Inter"/>
-                <a:ea typeface="Inter"/>
-                <a:cs typeface="Inter"/>
-                <a:sym typeface="Inter"/>
-              </a:rPr>
-              <a:t> </a:t>
-            </a:r>
-            <a:r>
-              <a:rPr lang="en-US" sz="1350" b="0" i="0" u="none" strike="noStrike" cap="none" dirty="0" err="1">
-                <a:solidFill>
-                  <a:srgbClr val="CBD5E1"/>
-                </a:solidFill>
-                <a:latin typeface="Inter"/>
-                <a:ea typeface="Inter"/>
-                <a:cs typeface="Inter"/>
-                <a:sym typeface="Inter"/>
-              </a:rPr>
-              <a:t>та</a:t>
-            </a:r>
-            <a:r>
-              <a:rPr lang="en-US" sz="1350" b="0" i="0" u="none" strike="noStrike" cap="none" dirty="0">
-                <a:solidFill>
-                  <a:srgbClr val="CBD5E1"/>
-                </a:solidFill>
-                <a:latin typeface="Inter"/>
-                <a:ea typeface="Inter"/>
-                <a:cs typeface="Inter"/>
-                <a:sym typeface="Inter"/>
-              </a:rPr>
-              <a:t> </a:t>
-            </a:r>
-            <a:r>
-              <a:rPr lang="en-US" sz="1350" b="0" i="0" u="none" strike="noStrike" cap="none" dirty="0" err="1">
-                <a:solidFill>
-                  <a:srgbClr val="CBD5E1"/>
-                </a:solidFill>
-                <a:latin typeface="Inter"/>
-                <a:ea typeface="Inter"/>
-                <a:cs typeface="Inter"/>
-                <a:sym typeface="Inter"/>
-              </a:rPr>
-              <a:t>кліренсом</a:t>
-            </a:r>
-            <a:r>
-              <a:rPr lang="en-US" sz="1350" b="0" i="0" u="none" strike="noStrike" cap="none" dirty="0">
-                <a:solidFill>
-                  <a:srgbClr val="CBD5E1"/>
-                </a:solidFill>
-                <a:latin typeface="Inter"/>
-                <a:ea typeface="Inter"/>
-                <a:cs typeface="Inter"/>
-                <a:sym typeface="Inter"/>
-              </a:rPr>
-              <a:t>.</a:t>
-            </a:r>
-            <a:endParaRPr dirty="0"/>
-          </a:p>
-        </p:txBody>
-      </p:sp>
-      <p:sp>
-        <p:nvSpPr>
-          <p:cNvPr id="172" name="Google Shape;172;p19"/>
-          <p:cNvSpPr txBox="1"/>
-          <p:nvPr/>
-        </p:nvSpPr>
-        <p:spPr>
-          <a:xfrm>
-            <a:off x="771525" y="581025"/>
-            <a:ext cx="11381422" cy="542925"/>
-          </a:xfrm>
-          <a:prstGeom prst="rect">
-            <a:avLst/>
-          </a:prstGeom>
-          <a:noFill/>
-          <a:ln>
-            <a:noFill/>
-          </a:ln>
-        </p:spPr>
-        <p:txBody>
-          <a:bodyPr spcFirstLastPara="1" wrap="square" lIns="0" tIns="0" rIns="0" bIns="0" anchor="t" anchorCtr="0">
-            <a:spAutoFit/>
-          </a:bodyPr>
-          <a:lstStyle/>
-          <a:p>
-            <a:pPr marL="0" marR="0" lvl="0" indent="0" algn="l" rtl="0">
-              <a:spcBef>
-                <a:spcPts val="0"/>
-              </a:spcBef>
-              <a:spcAft>
-                <a:spcPts val="0"/>
-              </a:spcAft>
-              <a:buNone/>
-            </a:pPr>
-            <a:r>
-              <a:rPr lang="en-US" sz="2850" b="1" i="0" u="none" strike="noStrike" cap="none">
-                <a:solidFill>
-                  <a:srgbClr val="F1F5F9"/>
-                </a:solidFill>
-                <a:latin typeface="Poppins SemiBold"/>
-                <a:ea typeface="Poppins SemiBold"/>
-                <a:cs typeface="Poppins SemiBold"/>
-                <a:sym typeface="Poppins SemiBold"/>
-              </a:rPr>
-              <a:t>Архітектура Системи</a:t>
-            </a:r>
-            <a:endParaRPr/>
-          </a:p>
-        </p:txBody>
-      </p:sp>
-      <p:sp>
-        <p:nvSpPr>
-          <p:cNvPr id="173" name="Google Shape;173;p19"/>
-          <p:cNvSpPr/>
-          <p:nvPr/>
-        </p:nvSpPr>
-        <p:spPr>
-          <a:xfrm>
-            <a:off x="581025" y="581025"/>
-            <a:ext cx="47625" cy="542925"/>
-          </a:xfrm>
-          <a:prstGeom prst="rect">
-            <a:avLst/>
-          </a:prstGeom>
-          <a:solidFill>
-            <a:srgbClr val="3B82F6"/>
-          </a:solidFill>
-          <a:ln>
-            <a:noFill/>
-          </a:ln>
-        </p:spPr>
-        <p:txBody>
-          <a:bodyPr spcFirstLastPara="1" wrap="square" lIns="91425" tIns="45700" rIns="91425" bIns="45700" anchor="ctr" anchorCtr="0">
-            <a:noAutofit/>
-          </a:bodyPr>
-          <a:lstStyle/>
-          <a:p>
-            <a:pPr marL="0" marR="0" lvl="0" indent="0" algn="ctr" rtl="0">
-              <a:spcBef>
-                <a:spcPts val="0"/>
-              </a:spcBef>
-              <a:spcAft>
-                <a:spcPts val="0"/>
-              </a:spcAft>
-              <a:buNone/>
-            </a:pPr>
-            <a:endParaRPr sz="1800" b="0" i="0" u="none" strike="noStrike" cap="none">
-              <a:solidFill>
-                <a:schemeClr val="dk1"/>
-              </a:solidFill>
-              <a:latin typeface="Calibri"/>
-              <a:ea typeface="Calibri"/>
-              <a:cs typeface="Calibri"/>
-              <a:sym typeface="Calibri"/>
-            </a:endParaRPr>
-          </a:p>
-        </p:txBody>
-      </p:sp>
-      <p:sp>
-        <p:nvSpPr>
-          <p:cNvPr id="2" name="Google Shape;163;p19">
-            <a:extLst>
-              <a:ext uri="{FF2B5EF4-FFF2-40B4-BE49-F238E27FC236}">
-                <a16:creationId xmlns:a16="http://schemas.microsoft.com/office/drawing/2014/main" id="{EDE43495-BE6A-4E5A-D3BC-D1371B2D1E1B}"/>
-              </a:ext>
-            </a:extLst>
-          </p:cNvPr>
-          <p:cNvSpPr txBox="1"/>
-          <p:nvPr/>
-        </p:nvSpPr>
-        <p:spPr>
-          <a:xfrm>
-            <a:off x="4337000" y="4293096"/>
-            <a:ext cx="3693742" cy="216085"/>
-          </a:xfrm>
-          <a:prstGeom prst="rect">
-            <a:avLst/>
-          </a:prstGeom>
-          <a:noFill/>
-          <a:ln>
-            <a:noFill/>
-          </a:ln>
-        </p:spPr>
-        <p:txBody>
-          <a:bodyPr spcFirstLastPara="1" wrap="square" lIns="0" tIns="0" rIns="0" bIns="0" anchor="t" anchorCtr="0">
-            <a:spAutoFit/>
-          </a:bodyPr>
-          <a:lstStyle/>
-          <a:p>
-            <a:pPr lvl="0"/>
-            <a:r>
-              <a:rPr lang="en-US" sz="1404" b="1" dirty="0" err="1">
-                <a:solidFill>
-                  <a:srgbClr val="F1F5F9"/>
-                </a:solidFill>
-                <a:latin typeface="Poppins"/>
-                <a:ea typeface="Poppins"/>
-                <a:cs typeface="Poppins"/>
-                <a:sym typeface="Poppins"/>
-              </a:rPr>
-              <a:t>NavGraph</a:t>
-            </a:r>
-            <a:endParaRPr lang="en-US" sz="1600" dirty="0"/>
-          </a:p>
-        </p:txBody>
-      </p:sp>
-      <p:sp>
-        <p:nvSpPr>
-          <p:cNvPr id="3" name="Google Shape;164;p19">
-            <a:extLst>
-              <a:ext uri="{FF2B5EF4-FFF2-40B4-BE49-F238E27FC236}">
-                <a16:creationId xmlns:a16="http://schemas.microsoft.com/office/drawing/2014/main" id="{2AE55BD0-AC47-AA03-FBF8-44A9A3B0B474}"/>
-              </a:ext>
-            </a:extLst>
-          </p:cNvPr>
-          <p:cNvSpPr txBox="1"/>
-          <p:nvPr/>
-        </p:nvSpPr>
-        <p:spPr>
-          <a:xfrm>
-            <a:off x="4337000" y="4740771"/>
-            <a:ext cx="3517850" cy="872547"/>
-          </a:xfrm>
-          <a:prstGeom prst="rect">
-            <a:avLst/>
-          </a:prstGeom>
-          <a:noFill/>
-          <a:ln>
-            <a:noFill/>
-          </a:ln>
-        </p:spPr>
-        <p:txBody>
-          <a:bodyPr spcFirstLastPara="1" wrap="square" lIns="0" tIns="0" rIns="0" bIns="0" anchor="t" anchorCtr="0">
-            <a:spAutoFit/>
-          </a:bodyPr>
-          <a:lstStyle/>
-          <a:p>
-            <a:pPr lvl="0">
-              <a:lnSpc>
-                <a:spcPct val="139925"/>
-              </a:lnSpc>
-            </a:pPr>
-            <a:r>
-              <a:rPr lang="uk-UA" sz="1350" dirty="0">
-                <a:solidFill>
-                  <a:srgbClr val="CBD5E1"/>
-                </a:solidFill>
-                <a:latin typeface="Inter"/>
-                <a:ea typeface="Inter"/>
-                <a:cs typeface="Inter"/>
-                <a:sym typeface="Inter"/>
-              </a:rPr>
-              <a:t>Генерує типи </a:t>
-            </a:r>
-            <a:r>
-              <a:rPr lang="uk-UA" sz="1350" dirty="0" err="1">
-                <a:solidFill>
-                  <a:srgbClr val="CBD5E1"/>
-                </a:solidFill>
-                <a:latin typeface="Inter"/>
-                <a:ea typeface="Inter"/>
-                <a:cs typeface="Inter"/>
-                <a:sym typeface="Inter"/>
-              </a:rPr>
-              <a:t>ребер</a:t>
-            </a:r>
-            <a:r>
-              <a:rPr lang="uk-UA" sz="1350" dirty="0">
-                <a:solidFill>
-                  <a:srgbClr val="CBD5E1"/>
-                </a:solidFill>
-                <a:latin typeface="Inter"/>
-                <a:ea typeface="Inter"/>
-                <a:cs typeface="Inter"/>
-                <a:sym typeface="Inter"/>
-              </a:rPr>
-              <a:t>: </a:t>
-            </a:r>
-            <a:r>
-              <a:rPr lang="en-US" sz="1350" dirty="0">
-                <a:solidFill>
-                  <a:srgbClr val="CBD5E1"/>
-                </a:solidFill>
-                <a:latin typeface="Inter"/>
-                <a:ea typeface="Inter"/>
-                <a:cs typeface="Inter"/>
-                <a:sym typeface="Inter"/>
-              </a:rPr>
-              <a:t>Walk, Jump, Fall. </a:t>
-            </a:r>
-            <a:r>
-              <a:rPr lang="uk-UA" sz="1350" dirty="0">
-                <a:solidFill>
-                  <a:srgbClr val="CBD5E1"/>
-                </a:solidFill>
-                <a:latin typeface="Inter"/>
-                <a:ea typeface="Inter"/>
-                <a:cs typeface="Inter"/>
-                <a:sym typeface="Inter"/>
-              </a:rPr>
-              <a:t>Виконує балістичну перевірку траєкторій.</a:t>
-            </a:r>
-            <a:endParaRPr lang="uk-UA" sz="1200" dirty="0"/>
-          </a:p>
-        </p:txBody>
-      </p:sp>
-      <p:sp>
-        <p:nvSpPr>
-          <p:cNvPr id="4" name="Google Shape;163;p19">
-            <a:extLst>
-              <a:ext uri="{FF2B5EF4-FFF2-40B4-BE49-F238E27FC236}">
-                <a16:creationId xmlns:a16="http://schemas.microsoft.com/office/drawing/2014/main" id="{F8915E1F-1893-4C1B-E879-14256E82BDD8}"/>
-              </a:ext>
-            </a:extLst>
-          </p:cNvPr>
-          <p:cNvSpPr txBox="1"/>
-          <p:nvPr/>
-        </p:nvSpPr>
-        <p:spPr>
-          <a:xfrm>
-            <a:off x="8092975" y="4293096"/>
-            <a:ext cx="3693742" cy="216085"/>
-          </a:xfrm>
-          <a:prstGeom prst="rect">
-            <a:avLst/>
-          </a:prstGeom>
-          <a:noFill/>
-          <a:ln>
-            <a:noFill/>
-          </a:ln>
-        </p:spPr>
-        <p:txBody>
-          <a:bodyPr spcFirstLastPara="1" wrap="square" lIns="0" tIns="0" rIns="0" bIns="0" anchor="t" anchorCtr="0">
-            <a:spAutoFit/>
-          </a:bodyPr>
-          <a:lstStyle/>
-          <a:p>
-            <a:pPr lvl="0"/>
-            <a:r>
-              <a:rPr lang="en-US" sz="1404" b="1" dirty="0" err="1">
-                <a:solidFill>
-                  <a:srgbClr val="F1F5F9"/>
-                </a:solidFill>
-                <a:latin typeface="Poppins"/>
-                <a:ea typeface="Poppins"/>
-                <a:cs typeface="Poppins"/>
-                <a:sym typeface="Poppins"/>
-              </a:rPr>
-              <a:t>KinodynamicAStar</a:t>
-            </a:r>
-            <a:endParaRPr lang="en-US" sz="1600" dirty="0"/>
-          </a:p>
-        </p:txBody>
-      </p:sp>
-      <p:sp>
-        <p:nvSpPr>
-          <p:cNvPr id="5" name="Google Shape;164;p19">
-            <a:extLst>
-              <a:ext uri="{FF2B5EF4-FFF2-40B4-BE49-F238E27FC236}">
-                <a16:creationId xmlns:a16="http://schemas.microsoft.com/office/drawing/2014/main" id="{ABDF4589-B7AA-9962-99DF-903691EF1D56}"/>
-              </a:ext>
-            </a:extLst>
-          </p:cNvPr>
-          <p:cNvSpPr txBox="1"/>
-          <p:nvPr/>
-        </p:nvSpPr>
-        <p:spPr>
-          <a:xfrm>
-            <a:off x="8092975" y="4740771"/>
-            <a:ext cx="3517850" cy="872547"/>
-          </a:xfrm>
-          <a:prstGeom prst="rect">
-            <a:avLst/>
-          </a:prstGeom>
-          <a:noFill/>
-          <a:ln>
-            <a:noFill/>
-          </a:ln>
-        </p:spPr>
-        <p:txBody>
-          <a:bodyPr spcFirstLastPara="1" wrap="square" lIns="0" tIns="0" rIns="0" bIns="0" anchor="t" anchorCtr="0">
-            <a:spAutoFit/>
-          </a:bodyPr>
-          <a:lstStyle/>
-          <a:p>
-            <a:pPr lvl="0">
-              <a:lnSpc>
-                <a:spcPct val="139925"/>
-              </a:lnSpc>
-            </a:pPr>
-            <a:r>
-              <a:rPr lang="uk-UA" sz="1350" dirty="0">
-                <a:solidFill>
-                  <a:srgbClr val="CBD5E1"/>
-                </a:solidFill>
-                <a:latin typeface="Inter"/>
-                <a:ea typeface="Inter"/>
-                <a:cs typeface="Inter"/>
-                <a:sym typeface="Inter"/>
-              </a:rPr>
-              <a:t>Пошук з евристикою, що враховує небезпеку та страх падіння (</a:t>
-            </a:r>
-            <a:r>
-              <a:rPr lang="en-US" sz="1350" dirty="0" err="1">
-                <a:solidFill>
-                  <a:srgbClr val="CBD5E1"/>
-                </a:solidFill>
-                <a:latin typeface="Inter"/>
-                <a:ea typeface="Inter"/>
-                <a:cs typeface="Inter"/>
-                <a:sym typeface="Inter"/>
-              </a:rPr>
-              <a:t>edgeProximity</a:t>
-            </a:r>
-            <a:r>
-              <a:rPr lang="en-US" sz="1350" dirty="0">
-                <a:solidFill>
-                  <a:srgbClr val="CBD5E1"/>
-                </a:solidFill>
-                <a:latin typeface="Inter"/>
-                <a:ea typeface="Inter"/>
-                <a:cs typeface="Inter"/>
-                <a:sym typeface="Inter"/>
-              </a:rPr>
-              <a:t>).</a:t>
-            </a:r>
-            <a:endParaRPr lang="en-US" sz="1200" dirty="0"/>
-          </a:p>
-        </p:txBody>
-      </p:sp>
-      <p:pic>
-        <p:nvPicPr>
-          <p:cNvPr id="7" name="Picture 6">
-            <a:extLst>
-              <a:ext uri="{FF2B5EF4-FFF2-40B4-BE49-F238E27FC236}">
-                <a16:creationId xmlns:a16="http://schemas.microsoft.com/office/drawing/2014/main" id="{51B733D1-2FD2-68CA-53C1-2D0404213B2E}"/>
-              </a:ext>
-            </a:extLst>
-          </p:cNvPr>
-          <p:cNvPicPr>
-            <a:picLocks/>
-          </p:cNvPicPr>
-          <p:nvPr/>
-        </p:nvPicPr>
-        <p:blipFill>
-          <a:blip r:embed="rId4"/>
-          <a:stretch>
-            <a:fillRect/>
-          </a:stretch>
-        </p:blipFill>
-        <p:spPr>
-          <a:xfrm>
-            <a:off x="581025" y="1786344"/>
-            <a:ext cx="3060000" cy="1800000"/>
-          </a:xfrm>
-          <a:prstGeom prst="roundRect">
-            <a:avLst/>
-          </a:prstGeom>
-        </p:spPr>
-      </p:pic>
-      <p:pic>
-        <p:nvPicPr>
-          <p:cNvPr id="9" name="Picture 8">
-            <a:extLst>
-              <a:ext uri="{FF2B5EF4-FFF2-40B4-BE49-F238E27FC236}">
-                <a16:creationId xmlns:a16="http://schemas.microsoft.com/office/drawing/2014/main" id="{7FDB217B-EAC7-3A76-6E33-93235D21A175}"/>
-              </a:ext>
-            </a:extLst>
-          </p:cNvPr>
-          <p:cNvPicPr>
-            <a:picLocks/>
-          </p:cNvPicPr>
-          <p:nvPr/>
-        </p:nvPicPr>
-        <p:blipFill>
-          <a:blip r:embed="rId5"/>
-          <a:stretch>
-            <a:fillRect/>
-          </a:stretch>
-        </p:blipFill>
-        <p:spPr>
-          <a:xfrm>
-            <a:off x="8092975" y="1786344"/>
-            <a:ext cx="3060000" cy="1800000"/>
-          </a:xfrm>
-          <a:prstGeom prst="roundRect">
-            <a:avLst/>
-          </a:prstGeom>
-        </p:spPr>
-      </p:pic>
-      <p:pic>
-        <p:nvPicPr>
-          <p:cNvPr id="11" name="Picture 10">
-            <a:extLst>
-              <a:ext uri="{FF2B5EF4-FFF2-40B4-BE49-F238E27FC236}">
-                <a16:creationId xmlns:a16="http://schemas.microsoft.com/office/drawing/2014/main" id="{1D897B90-87BC-E6D7-C566-D8C5E134C1B6}"/>
-              </a:ext>
-            </a:extLst>
-          </p:cNvPr>
-          <p:cNvPicPr>
-            <a:picLocks/>
-          </p:cNvPicPr>
-          <p:nvPr/>
-        </p:nvPicPr>
-        <p:blipFill>
-          <a:blip r:embed="rId6"/>
-          <a:stretch>
-            <a:fillRect/>
-          </a:stretch>
-        </p:blipFill>
-        <p:spPr>
-          <a:xfrm>
-            <a:off x="4337000" y="1786344"/>
-            <a:ext cx="3060000" cy="1800000"/>
-          </a:xfrm>
-          <a:prstGeom prst="roundRect">
-            <a:avLst/>
-          </a:prstGeom>
-        </p:spPr>
-      </p:pic>
-      <p:sp>
-        <p:nvSpPr>
-          <p:cNvPr id="12" name="Google Shape;109;p15">
-            <a:extLst>
-              <a:ext uri="{FF2B5EF4-FFF2-40B4-BE49-F238E27FC236}">
-                <a16:creationId xmlns:a16="http://schemas.microsoft.com/office/drawing/2014/main" id="{DDE438B9-27C5-7D87-6121-8C9121143AE0}"/>
-              </a:ext>
-            </a:extLst>
-          </p:cNvPr>
-          <p:cNvSpPr txBox="1"/>
-          <p:nvPr/>
-        </p:nvSpPr>
-        <p:spPr>
-          <a:xfrm>
-            <a:off x="11390654" y="581025"/>
-            <a:ext cx="143704" cy="430887"/>
-          </a:xfrm>
-          <a:prstGeom prst="rect">
-            <a:avLst/>
-          </a:prstGeom>
-          <a:noFill/>
-          <a:ln>
-            <a:noFill/>
-          </a:ln>
-        </p:spPr>
-        <p:txBody>
-          <a:bodyPr spcFirstLastPara="1" wrap="square" lIns="0" tIns="0" rIns="0" bIns="0" anchor="t" anchorCtr="0">
-            <a:spAutoFit/>
-          </a:bodyPr>
-          <a:lstStyle/>
-          <a:p>
-            <a:pPr marL="0" marR="0" lvl="0" indent="0" algn="l" rtl="0">
-              <a:lnSpc>
-                <a:spcPct val="139925"/>
-              </a:lnSpc>
-              <a:spcBef>
-                <a:spcPts val="0"/>
-              </a:spcBef>
-              <a:spcAft>
-                <a:spcPts val="0"/>
-              </a:spcAft>
-              <a:buNone/>
-            </a:pPr>
-            <a:r>
-              <a:rPr lang="uk-UA" sz="2000" dirty="0">
-                <a:solidFill>
-                  <a:schemeClr val="bg1"/>
-                </a:solidFill>
-                <a:latin typeface="Inter"/>
-                <a:ea typeface="Inter"/>
-                <a:sym typeface="Inter"/>
-              </a:rPr>
-              <a:t>6</a:t>
-            </a:r>
-            <a:endParaRPr sz="2000" dirty="0">
-              <a:solidFill>
-                <a:schemeClr val="bg1"/>
-              </a:solidFill>
-            </a:endParaRPr>
-          </a:p>
-        </p:txBody>
-      </p:sp>
-    </p:spTree>
-  </p:cSld>
-  <p:clrMapOvr>
-    <a:masterClrMapping/>
-  </p:clrMapOvr>
-</p:sld>
-</file>
-
-<file path=ppt/slides/slide7.xml><?xml version="1.0" encoding="utf-8"?>
 <p:sld xmlns:a="http://schemas.openxmlformats.org/drawingml/2006/main" xmlns:r="http://schemas.openxmlformats.org/officeDocument/2006/relationships" xmlns:p="http://schemas.openxmlformats.org/presentationml/2006/main">
   <p:cSld>
     <p:bg>
@@ -20434,7 +21544,920 @@
               <a:buNone/>
             </a:pPr>
             <a:r>
-              <a:rPr lang="uk-UA" sz="2000" dirty="0">
+              <a:rPr lang="en-US" sz="2000" dirty="0">
+                <a:solidFill>
+                  <a:schemeClr val="bg1"/>
+                </a:solidFill>
+                <a:latin typeface="Inter"/>
+                <a:ea typeface="Inter"/>
+                <a:sym typeface="Inter"/>
+              </a:rPr>
+              <a:t>6</a:t>
+            </a:r>
+            <a:endParaRPr sz="2000" dirty="0">
+              <a:solidFill>
+                <a:schemeClr val="bg1"/>
+              </a:solidFill>
+            </a:endParaRPr>
+          </a:p>
+        </p:txBody>
+      </p:sp>
+    </p:spTree>
+  </p:cSld>
+  <p:clrMapOvr>
+    <a:masterClrMapping/>
+  </p:clrMapOvr>
+</p:sld>
+</file>
+
+<file path=ppt/slides/slide7.xml><?xml version="1.0" encoding="utf-8"?>
+<p:sld xmlns:a="http://schemas.openxmlformats.org/drawingml/2006/main" xmlns:r="http://schemas.openxmlformats.org/officeDocument/2006/relationships" xmlns:p="http://schemas.openxmlformats.org/presentationml/2006/main">
+  <p:cSld>
+    <p:bg>
+      <p:bgPr>
+        <a:solidFill>
+          <a:srgbClr val="0F172A"/>
+        </a:solidFill>
+        <a:effectLst/>
+      </p:bgPr>
+    </p:bg>
+    <p:spTree>
+      <p:nvGrpSpPr>
+        <p:cNvPr id="1" name="Shape 160"/>
+        <p:cNvGrpSpPr/>
+        <p:nvPr/>
+      </p:nvGrpSpPr>
+      <p:grpSpPr>
+        <a:xfrm>
+          <a:off x="0" y="0"/>
+          <a:ext cx="0" cy="0"/>
+          <a:chOff x="0" y="0"/>
+          <a:chExt cx="0" cy="0"/>
+        </a:xfrm>
+      </p:grpSpPr>
+      <p:pic>
+        <p:nvPicPr>
+          <p:cNvPr id="161" name="Google Shape;161;p19" descr="image.png"/>
+          <p:cNvPicPr preferRelativeResize="0"/>
+          <p:nvPr/>
+        </p:nvPicPr>
+        <p:blipFill rotWithShape="1">
+          <a:blip r:embed="rId3">
+            <a:alphaModFix/>
+          </a:blip>
+          <a:srcRect/>
+          <a:stretch/>
+        </p:blipFill>
+        <p:spPr>
+          <a:xfrm>
+            <a:off x="0" y="0"/>
+            <a:ext cx="12192000" cy="6858000"/>
+          </a:xfrm>
+          <a:prstGeom prst="rect">
+            <a:avLst/>
+          </a:prstGeom>
+          <a:noFill/>
+          <a:ln>
+            <a:noFill/>
+          </a:ln>
+        </p:spPr>
+      </p:pic>
+      <p:sp>
+        <p:nvSpPr>
+          <p:cNvPr id="163" name="Google Shape;163;p19"/>
+          <p:cNvSpPr txBox="1"/>
+          <p:nvPr/>
+        </p:nvSpPr>
+        <p:spPr>
+          <a:xfrm>
+            <a:off x="581025" y="4293096"/>
+            <a:ext cx="3693742" cy="276225"/>
+          </a:xfrm>
+          <a:prstGeom prst="rect">
+            <a:avLst/>
+          </a:prstGeom>
+          <a:noFill/>
+          <a:ln>
+            <a:noFill/>
+          </a:ln>
+        </p:spPr>
+        <p:txBody>
+          <a:bodyPr spcFirstLastPara="1" wrap="square" lIns="0" tIns="0" rIns="0" bIns="0" anchor="t" anchorCtr="0">
+            <a:spAutoFit/>
+          </a:bodyPr>
+          <a:lstStyle/>
+          <a:p>
+            <a:pPr marL="0" marR="0" lvl="0" indent="0" algn="l" rtl="0">
+              <a:spcBef>
+                <a:spcPts val="0"/>
+              </a:spcBef>
+              <a:spcAft>
+                <a:spcPts val="0"/>
+              </a:spcAft>
+              <a:buNone/>
+            </a:pPr>
+            <a:r>
+              <a:rPr lang="en-US" sz="1404" b="1" i="0" u="none" strike="noStrike" cap="none">
+                <a:solidFill>
+                  <a:srgbClr val="F1F5F9"/>
+                </a:solidFill>
+                <a:latin typeface="Poppins"/>
+                <a:ea typeface="Poppins"/>
+                <a:cs typeface="Poppins"/>
+                <a:sym typeface="Poppins"/>
+              </a:rPr>
+              <a:t>SceneVoxelizer</a:t>
+            </a:r>
+            <a:endParaRPr/>
+          </a:p>
+        </p:txBody>
+      </p:sp>
+      <p:sp>
+        <p:nvSpPr>
+          <p:cNvPr id="164" name="Google Shape;164;p19"/>
+          <p:cNvSpPr txBox="1"/>
+          <p:nvPr/>
+        </p:nvSpPr>
+        <p:spPr>
+          <a:xfrm>
+            <a:off x="581025" y="4740771"/>
+            <a:ext cx="3517850" cy="581698"/>
+          </a:xfrm>
+          <a:prstGeom prst="rect">
+            <a:avLst/>
+          </a:prstGeom>
+          <a:noFill/>
+          <a:ln>
+            <a:noFill/>
+          </a:ln>
+        </p:spPr>
+        <p:txBody>
+          <a:bodyPr spcFirstLastPara="1" wrap="square" lIns="0" tIns="0" rIns="0" bIns="0" anchor="t" anchorCtr="0">
+            <a:spAutoFit/>
+          </a:bodyPr>
+          <a:lstStyle/>
+          <a:p>
+            <a:pPr marL="0" marR="0" lvl="0" indent="0" algn="l" rtl="0">
+              <a:lnSpc>
+                <a:spcPct val="139925"/>
+              </a:lnSpc>
+              <a:spcBef>
+                <a:spcPts val="0"/>
+              </a:spcBef>
+              <a:spcAft>
+                <a:spcPts val="0"/>
+              </a:spcAft>
+              <a:buNone/>
+            </a:pPr>
+            <a:r>
+              <a:rPr lang="en-US" sz="1350" b="0" i="0" u="none" strike="noStrike" cap="none" dirty="0" err="1">
+                <a:solidFill>
+                  <a:srgbClr val="CBD5E1"/>
+                </a:solidFill>
+                <a:latin typeface="Inter"/>
+                <a:ea typeface="Inter"/>
+                <a:cs typeface="Inter"/>
+                <a:sym typeface="Inter"/>
+              </a:rPr>
+              <a:t>Будує</a:t>
+            </a:r>
+            <a:r>
+              <a:rPr lang="en-US" sz="1350" b="0" i="0" u="none" strike="noStrike" cap="none" dirty="0">
+                <a:solidFill>
+                  <a:srgbClr val="CBD5E1"/>
+                </a:solidFill>
+                <a:latin typeface="Inter"/>
+                <a:ea typeface="Inter"/>
+                <a:cs typeface="Inter"/>
+                <a:sym typeface="Inter"/>
+              </a:rPr>
+              <a:t> </a:t>
+            </a:r>
+            <a:r>
+              <a:rPr lang="en-US" sz="1350" b="0" i="0" u="none" strike="noStrike" cap="none" dirty="0" err="1">
+                <a:solidFill>
+                  <a:srgbClr val="CBD5E1"/>
+                </a:solidFill>
+                <a:latin typeface="Inter"/>
+                <a:ea typeface="Inter"/>
+                <a:cs typeface="Inter"/>
+                <a:sym typeface="Inter"/>
+              </a:rPr>
+              <a:t>октодерево</a:t>
+            </a:r>
+            <a:r>
+              <a:rPr lang="en-US" sz="1350" b="0" i="0" u="none" strike="noStrike" cap="none" dirty="0">
+                <a:solidFill>
+                  <a:srgbClr val="CBD5E1"/>
+                </a:solidFill>
+                <a:latin typeface="Inter"/>
+                <a:ea typeface="Inter"/>
+                <a:cs typeface="Inter"/>
+                <a:sym typeface="Inter"/>
+              </a:rPr>
+              <a:t>. </a:t>
+            </a:r>
+            <a:r>
+              <a:rPr lang="en-US" sz="1350" b="0" i="0" u="none" strike="noStrike" cap="none" dirty="0" err="1">
+                <a:solidFill>
+                  <a:srgbClr val="CBD5E1"/>
+                </a:solidFill>
+                <a:latin typeface="Inter"/>
+                <a:ea typeface="Inter"/>
+                <a:cs typeface="Inter"/>
+                <a:sym typeface="Inter"/>
+              </a:rPr>
+              <a:t>Класифікує</a:t>
+            </a:r>
+            <a:r>
+              <a:rPr lang="en-US" sz="1350" b="0" i="0" u="none" strike="noStrike" cap="none" dirty="0">
+                <a:solidFill>
+                  <a:srgbClr val="CBD5E1"/>
+                </a:solidFill>
+                <a:latin typeface="Inter"/>
+                <a:ea typeface="Inter"/>
+                <a:cs typeface="Inter"/>
+                <a:sym typeface="Inter"/>
+              </a:rPr>
+              <a:t> </a:t>
+            </a:r>
+            <a:r>
+              <a:rPr lang="en-US" sz="1350" b="0" i="0" u="none" strike="noStrike" cap="none" dirty="0" err="1">
+                <a:solidFill>
+                  <a:srgbClr val="CBD5E1"/>
+                </a:solidFill>
+                <a:latin typeface="Inter"/>
+                <a:ea typeface="Inter"/>
+                <a:cs typeface="Inter"/>
+                <a:sym typeface="Inter"/>
+              </a:rPr>
+              <a:t>прохідні</a:t>
+            </a:r>
+            <a:r>
+              <a:rPr lang="en-US" sz="1350" b="0" i="0" u="none" strike="noStrike" cap="none" dirty="0">
+                <a:solidFill>
+                  <a:srgbClr val="CBD5E1"/>
+                </a:solidFill>
+                <a:latin typeface="Inter"/>
+                <a:ea typeface="Inter"/>
+                <a:cs typeface="Inter"/>
+                <a:sym typeface="Inter"/>
+              </a:rPr>
+              <a:t> </a:t>
+            </a:r>
+            <a:r>
+              <a:rPr lang="en-US" sz="1350" b="0" i="0" u="none" strike="noStrike" cap="none" dirty="0" err="1">
+                <a:solidFill>
+                  <a:srgbClr val="CBD5E1"/>
+                </a:solidFill>
+                <a:latin typeface="Inter"/>
+                <a:ea typeface="Inter"/>
+                <a:cs typeface="Inter"/>
+                <a:sym typeface="Inter"/>
+              </a:rPr>
+              <a:t>вокселі</a:t>
+            </a:r>
+            <a:r>
+              <a:rPr lang="en-US" sz="1350" b="0" i="0" u="none" strike="noStrike" cap="none" dirty="0">
+                <a:solidFill>
+                  <a:srgbClr val="CBD5E1"/>
+                </a:solidFill>
+                <a:latin typeface="Inter"/>
+                <a:ea typeface="Inter"/>
+                <a:cs typeface="Inter"/>
+                <a:sym typeface="Inter"/>
+              </a:rPr>
+              <a:t> </a:t>
+            </a:r>
+            <a:r>
+              <a:rPr lang="en-US" sz="1350" b="0" i="0" u="none" strike="noStrike" cap="none" dirty="0" err="1">
+                <a:solidFill>
+                  <a:srgbClr val="CBD5E1"/>
+                </a:solidFill>
+                <a:latin typeface="Inter"/>
+                <a:ea typeface="Inter"/>
+                <a:cs typeface="Inter"/>
+                <a:sym typeface="Inter"/>
+              </a:rPr>
+              <a:t>за</a:t>
+            </a:r>
+            <a:r>
+              <a:rPr lang="en-US" sz="1350" b="0" i="0" u="none" strike="noStrike" cap="none" dirty="0">
+                <a:solidFill>
+                  <a:srgbClr val="CBD5E1"/>
+                </a:solidFill>
+                <a:latin typeface="Inter"/>
+                <a:ea typeface="Inter"/>
+                <a:cs typeface="Inter"/>
+                <a:sym typeface="Inter"/>
+              </a:rPr>
+              <a:t> </a:t>
+            </a:r>
+            <a:r>
+              <a:rPr lang="en-US" sz="1350" b="0" i="0" u="none" strike="noStrike" cap="none" dirty="0" err="1">
+                <a:solidFill>
+                  <a:srgbClr val="CBD5E1"/>
+                </a:solidFill>
+                <a:latin typeface="Inter"/>
+                <a:ea typeface="Inter"/>
+                <a:cs typeface="Inter"/>
+                <a:sym typeface="Inter"/>
+              </a:rPr>
+              <a:t>кутом</a:t>
+            </a:r>
+            <a:r>
+              <a:rPr lang="en-US" sz="1350" b="0" i="0" u="none" strike="noStrike" cap="none" dirty="0">
+                <a:solidFill>
+                  <a:srgbClr val="CBD5E1"/>
+                </a:solidFill>
+                <a:latin typeface="Inter"/>
+                <a:ea typeface="Inter"/>
+                <a:cs typeface="Inter"/>
+                <a:sym typeface="Inter"/>
+              </a:rPr>
+              <a:t> </a:t>
+            </a:r>
+            <a:r>
+              <a:rPr lang="en-US" sz="1350" b="0" i="0" u="none" strike="noStrike" cap="none" dirty="0" err="1">
+                <a:solidFill>
+                  <a:srgbClr val="CBD5E1"/>
+                </a:solidFill>
+                <a:latin typeface="Inter"/>
+                <a:ea typeface="Inter"/>
+                <a:cs typeface="Inter"/>
+                <a:sym typeface="Inter"/>
+              </a:rPr>
+              <a:t>нахилу</a:t>
+            </a:r>
+            <a:r>
+              <a:rPr lang="en-US" sz="1350" b="0" i="0" u="none" strike="noStrike" cap="none" dirty="0">
+                <a:solidFill>
+                  <a:srgbClr val="CBD5E1"/>
+                </a:solidFill>
+                <a:latin typeface="Inter"/>
+                <a:ea typeface="Inter"/>
+                <a:cs typeface="Inter"/>
+                <a:sym typeface="Inter"/>
+              </a:rPr>
+              <a:t> </a:t>
+            </a:r>
+            <a:r>
+              <a:rPr lang="en-US" sz="1350" b="0" i="0" u="none" strike="noStrike" cap="none" dirty="0" err="1">
+                <a:solidFill>
+                  <a:srgbClr val="CBD5E1"/>
+                </a:solidFill>
+                <a:latin typeface="Inter"/>
+                <a:ea typeface="Inter"/>
+                <a:cs typeface="Inter"/>
+                <a:sym typeface="Inter"/>
+              </a:rPr>
+              <a:t>та</a:t>
+            </a:r>
+            <a:r>
+              <a:rPr lang="en-US" sz="1350" b="0" i="0" u="none" strike="noStrike" cap="none" dirty="0">
+                <a:solidFill>
+                  <a:srgbClr val="CBD5E1"/>
+                </a:solidFill>
+                <a:latin typeface="Inter"/>
+                <a:ea typeface="Inter"/>
+                <a:cs typeface="Inter"/>
+                <a:sym typeface="Inter"/>
+              </a:rPr>
+              <a:t> </a:t>
+            </a:r>
+            <a:r>
+              <a:rPr lang="en-US" sz="1350" b="0" i="0" u="none" strike="noStrike" cap="none" dirty="0" err="1">
+                <a:solidFill>
+                  <a:srgbClr val="CBD5E1"/>
+                </a:solidFill>
+                <a:latin typeface="Inter"/>
+                <a:ea typeface="Inter"/>
+                <a:cs typeface="Inter"/>
+                <a:sym typeface="Inter"/>
+              </a:rPr>
+              <a:t>кліренсом</a:t>
+            </a:r>
+            <a:r>
+              <a:rPr lang="en-US" sz="1350" b="0" i="0" u="none" strike="noStrike" cap="none" dirty="0">
+                <a:solidFill>
+                  <a:srgbClr val="CBD5E1"/>
+                </a:solidFill>
+                <a:latin typeface="Inter"/>
+                <a:ea typeface="Inter"/>
+                <a:cs typeface="Inter"/>
+                <a:sym typeface="Inter"/>
+              </a:rPr>
+              <a:t>.</a:t>
+            </a:r>
+            <a:endParaRPr dirty="0"/>
+          </a:p>
+        </p:txBody>
+      </p:sp>
+      <p:sp>
+        <p:nvSpPr>
+          <p:cNvPr id="172" name="Google Shape;172;p19"/>
+          <p:cNvSpPr txBox="1"/>
+          <p:nvPr/>
+        </p:nvSpPr>
+        <p:spPr>
+          <a:xfrm>
+            <a:off x="771525" y="581025"/>
+            <a:ext cx="11381422" cy="542925"/>
+          </a:xfrm>
+          <a:prstGeom prst="rect">
+            <a:avLst/>
+          </a:prstGeom>
+          <a:noFill/>
+          <a:ln>
+            <a:noFill/>
+          </a:ln>
+        </p:spPr>
+        <p:txBody>
+          <a:bodyPr spcFirstLastPara="1" wrap="square" lIns="0" tIns="0" rIns="0" bIns="0" anchor="t" anchorCtr="0">
+            <a:spAutoFit/>
+          </a:bodyPr>
+          <a:lstStyle/>
+          <a:p>
+            <a:pPr marL="0" marR="0" lvl="0" indent="0" algn="l" rtl="0">
+              <a:spcBef>
+                <a:spcPts val="0"/>
+              </a:spcBef>
+              <a:spcAft>
+                <a:spcPts val="0"/>
+              </a:spcAft>
+              <a:buNone/>
+            </a:pPr>
+            <a:r>
+              <a:rPr lang="en-US" sz="2850" b="1" i="0" u="none" strike="noStrike" cap="none">
+                <a:solidFill>
+                  <a:srgbClr val="F1F5F9"/>
+                </a:solidFill>
+                <a:latin typeface="Poppins SemiBold"/>
+                <a:ea typeface="Poppins SemiBold"/>
+                <a:cs typeface="Poppins SemiBold"/>
+                <a:sym typeface="Poppins SemiBold"/>
+              </a:rPr>
+              <a:t>Архітектура Системи</a:t>
+            </a:r>
+            <a:endParaRPr/>
+          </a:p>
+        </p:txBody>
+      </p:sp>
+      <p:sp>
+        <p:nvSpPr>
+          <p:cNvPr id="173" name="Google Shape;173;p19"/>
+          <p:cNvSpPr/>
+          <p:nvPr/>
+        </p:nvSpPr>
+        <p:spPr>
+          <a:xfrm>
+            <a:off x="581025" y="581025"/>
+            <a:ext cx="47625" cy="542925"/>
+          </a:xfrm>
+          <a:prstGeom prst="rect">
+            <a:avLst/>
+          </a:prstGeom>
+          <a:solidFill>
+            <a:srgbClr val="3B82F6"/>
+          </a:solidFill>
+          <a:ln>
+            <a:noFill/>
+          </a:ln>
+        </p:spPr>
+        <p:txBody>
+          <a:bodyPr spcFirstLastPara="1" wrap="square" lIns="91425" tIns="45700" rIns="91425" bIns="45700" anchor="ctr" anchorCtr="0">
+            <a:noAutofit/>
+          </a:bodyPr>
+          <a:lstStyle/>
+          <a:p>
+            <a:pPr marL="0" marR="0" lvl="0" indent="0" algn="ctr" rtl="0">
+              <a:spcBef>
+                <a:spcPts val="0"/>
+              </a:spcBef>
+              <a:spcAft>
+                <a:spcPts val="0"/>
+              </a:spcAft>
+              <a:buNone/>
+            </a:pPr>
+            <a:endParaRPr sz="1800" b="0" i="0" u="none" strike="noStrike" cap="none">
+              <a:solidFill>
+                <a:schemeClr val="dk1"/>
+              </a:solidFill>
+              <a:latin typeface="Calibri"/>
+              <a:ea typeface="Calibri"/>
+              <a:cs typeface="Calibri"/>
+              <a:sym typeface="Calibri"/>
+            </a:endParaRPr>
+          </a:p>
+        </p:txBody>
+      </p:sp>
+      <p:sp>
+        <p:nvSpPr>
+          <p:cNvPr id="2" name="Google Shape;163;p19">
+            <a:extLst>
+              <a:ext uri="{FF2B5EF4-FFF2-40B4-BE49-F238E27FC236}">
+                <a16:creationId xmlns:a16="http://schemas.microsoft.com/office/drawing/2014/main" id="{EDE43495-BE6A-4E5A-D3BC-D1371B2D1E1B}"/>
+              </a:ext>
+            </a:extLst>
+          </p:cNvPr>
+          <p:cNvSpPr txBox="1"/>
+          <p:nvPr/>
+        </p:nvSpPr>
+        <p:spPr>
+          <a:xfrm>
+            <a:off x="4337000" y="4293096"/>
+            <a:ext cx="3693742" cy="216085"/>
+          </a:xfrm>
+          <a:prstGeom prst="rect">
+            <a:avLst/>
+          </a:prstGeom>
+          <a:noFill/>
+          <a:ln>
+            <a:noFill/>
+          </a:ln>
+        </p:spPr>
+        <p:txBody>
+          <a:bodyPr spcFirstLastPara="1" wrap="square" lIns="0" tIns="0" rIns="0" bIns="0" anchor="t" anchorCtr="0">
+            <a:spAutoFit/>
+          </a:bodyPr>
+          <a:lstStyle/>
+          <a:p>
+            <a:pPr lvl="0"/>
+            <a:r>
+              <a:rPr lang="en-US" sz="1404" b="1" dirty="0" err="1">
+                <a:solidFill>
+                  <a:srgbClr val="F1F5F9"/>
+                </a:solidFill>
+                <a:latin typeface="Poppins"/>
+                <a:ea typeface="Poppins"/>
+                <a:cs typeface="Poppins"/>
+                <a:sym typeface="Poppins"/>
+              </a:rPr>
+              <a:t>NavGraph</a:t>
+            </a:r>
+            <a:endParaRPr lang="en-US" sz="1600" dirty="0"/>
+          </a:p>
+        </p:txBody>
+      </p:sp>
+      <p:sp>
+        <p:nvSpPr>
+          <p:cNvPr id="3" name="Google Shape;164;p19">
+            <a:extLst>
+              <a:ext uri="{FF2B5EF4-FFF2-40B4-BE49-F238E27FC236}">
+                <a16:creationId xmlns:a16="http://schemas.microsoft.com/office/drawing/2014/main" id="{2AE55BD0-AC47-AA03-FBF8-44A9A3B0B474}"/>
+              </a:ext>
+            </a:extLst>
+          </p:cNvPr>
+          <p:cNvSpPr txBox="1"/>
+          <p:nvPr/>
+        </p:nvSpPr>
+        <p:spPr>
+          <a:xfrm>
+            <a:off x="4337000" y="4740771"/>
+            <a:ext cx="3517850" cy="872547"/>
+          </a:xfrm>
+          <a:prstGeom prst="rect">
+            <a:avLst/>
+          </a:prstGeom>
+          <a:noFill/>
+          <a:ln>
+            <a:noFill/>
+          </a:ln>
+        </p:spPr>
+        <p:txBody>
+          <a:bodyPr spcFirstLastPara="1" wrap="square" lIns="0" tIns="0" rIns="0" bIns="0" anchor="t" anchorCtr="0">
+            <a:spAutoFit/>
+          </a:bodyPr>
+          <a:lstStyle/>
+          <a:p>
+            <a:pPr lvl="0">
+              <a:lnSpc>
+                <a:spcPct val="139925"/>
+              </a:lnSpc>
+            </a:pPr>
+            <a:r>
+              <a:rPr lang="uk-UA" sz="1350" dirty="0">
+                <a:solidFill>
+                  <a:srgbClr val="CBD5E1"/>
+                </a:solidFill>
+                <a:latin typeface="Inter"/>
+                <a:ea typeface="Inter"/>
+                <a:cs typeface="Inter"/>
+                <a:sym typeface="Inter"/>
+              </a:rPr>
+              <a:t>Генерує типи </a:t>
+            </a:r>
+            <a:r>
+              <a:rPr lang="uk-UA" sz="1350" dirty="0" err="1">
+                <a:solidFill>
+                  <a:srgbClr val="CBD5E1"/>
+                </a:solidFill>
+                <a:latin typeface="Inter"/>
+                <a:ea typeface="Inter"/>
+                <a:cs typeface="Inter"/>
+                <a:sym typeface="Inter"/>
+              </a:rPr>
+              <a:t>ребер</a:t>
+            </a:r>
+            <a:r>
+              <a:rPr lang="uk-UA" sz="1350" dirty="0">
+                <a:solidFill>
+                  <a:srgbClr val="CBD5E1"/>
+                </a:solidFill>
+                <a:latin typeface="Inter"/>
+                <a:ea typeface="Inter"/>
+                <a:cs typeface="Inter"/>
+                <a:sym typeface="Inter"/>
+              </a:rPr>
+              <a:t>: </a:t>
+            </a:r>
+            <a:r>
+              <a:rPr lang="en-US" sz="1350" dirty="0">
+                <a:solidFill>
+                  <a:srgbClr val="CBD5E1"/>
+                </a:solidFill>
+                <a:latin typeface="Inter"/>
+                <a:ea typeface="Inter"/>
+                <a:cs typeface="Inter"/>
+                <a:sym typeface="Inter"/>
+              </a:rPr>
+              <a:t>Walk, Jump, Fall. </a:t>
+            </a:r>
+            <a:r>
+              <a:rPr lang="uk-UA" sz="1350" dirty="0">
+                <a:solidFill>
+                  <a:srgbClr val="CBD5E1"/>
+                </a:solidFill>
+                <a:latin typeface="Inter"/>
+                <a:ea typeface="Inter"/>
+                <a:cs typeface="Inter"/>
+                <a:sym typeface="Inter"/>
+              </a:rPr>
+              <a:t>Виконує балістичну перевірку траєкторій.</a:t>
+            </a:r>
+            <a:endParaRPr lang="uk-UA" sz="1200" dirty="0"/>
+          </a:p>
+        </p:txBody>
+      </p:sp>
+      <p:sp>
+        <p:nvSpPr>
+          <p:cNvPr id="4" name="Google Shape;163;p19">
+            <a:extLst>
+              <a:ext uri="{FF2B5EF4-FFF2-40B4-BE49-F238E27FC236}">
+                <a16:creationId xmlns:a16="http://schemas.microsoft.com/office/drawing/2014/main" id="{F8915E1F-1893-4C1B-E879-14256E82BDD8}"/>
+              </a:ext>
+            </a:extLst>
+          </p:cNvPr>
+          <p:cNvSpPr txBox="1"/>
+          <p:nvPr/>
+        </p:nvSpPr>
+        <p:spPr>
+          <a:xfrm>
+            <a:off x="8092975" y="4293096"/>
+            <a:ext cx="3693742" cy="216085"/>
+          </a:xfrm>
+          <a:prstGeom prst="rect">
+            <a:avLst/>
+          </a:prstGeom>
+          <a:noFill/>
+          <a:ln>
+            <a:noFill/>
+          </a:ln>
+        </p:spPr>
+        <p:txBody>
+          <a:bodyPr spcFirstLastPara="1" wrap="square" lIns="0" tIns="0" rIns="0" bIns="0" anchor="t" anchorCtr="0">
+            <a:spAutoFit/>
+          </a:bodyPr>
+          <a:lstStyle/>
+          <a:p>
+            <a:pPr lvl="0"/>
+            <a:r>
+              <a:rPr lang="en-US" sz="1404" b="1" dirty="0" err="1">
+                <a:solidFill>
+                  <a:srgbClr val="F1F5F9"/>
+                </a:solidFill>
+                <a:latin typeface="Poppins"/>
+                <a:ea typeface="Poppins"/>
+                <a:cs typeface="Poppins"/>
+                <a:sym typeface="Poppins"/>
+              </a:rPr>
+              <a:t>KinodynamicAStar</a:t>
+            </a:r>
+            <a:endParaRPr lang="en-US" sz="1600" dirty="0"/>
+          </a:p>
+        </p:txBody>
+      </p:sp>
+      <p:sp>
+        <p:nvSpPr>
+          <p:cNvPr id="5" name="Google Shape;164;p19">
+            <a:extLst>
+              <a:ext uri="{FF2B5EF4-FFF2-40B4-BE49-F238E27FC236}">
+                <a16:creationId xmlns:a16="http://schemas.microsoft.com/office/drawing/2014/main" id="{ABDF4589-B7AA-9962-99DF-903691EF1D56}"/>
+              </a:ext>
+            </a:extLst>
+          </p:cNvPr>
+          <p:cNvSpPr txBox="1"/>
+          <p:nvPr/>
+        </p:nvSpPr>
+        <p:spPr>
+          <a:xfrm>
+            <a:off x="8092975" y="4740771"/>
+            <a:ext cx="3517850" cy="872547"/>
+          </a:xfrm>
+          <a:prstGeom prst="rect">
+            <a:avLst/>
+          </a:prstGeom>
+          <a:noFill/>
+          <a:ln>
+            <a:noFill/>
+          </a:ln>
+        </p:spPr>
+        <p:txBody>
+          <a:bodyPr spcFirstLastPara="1" wrap="square" lIns="0" tIns="0" rIns="0" bIns="0" anchor="t" anchorCtr="0">
+            <a:spAutoFit/>
+          </a:bodyPr>
+          <a:lstStyle/>
+          <a:p>
+            <a:pPr lvl="0">
+              <a:lnSpc>
+                <a:spcPct val="139925"/>
+              </a:lnSpc>
+            </a:pPr>
+            <a:r>
+              <a:rPr lang="uk-UA" sz="1350" dirty="0">
+                <a:solidFill>
+                  <a:srgbClr val="CBD5E1"/>
+                </a:solidFill>
+                <a:latin typeface="Inter"/>
+                <a:ea typeface="Inter"/>
+                <a:cs typeface="Inter"/>
+                <a:sym typeface="Inter"/>
+              </a:rPr>
+              <a:t>Пошук з евристикою, що враховує небезпеку та страх падіння (</a:t>
+            </a:r>
+            <a:r>
+              <a:rPr lang="en-US" sz="1350" dirty="0" err="1">
+                <a:solidFill>
+                  <a:srgbClr val="CBD5E1"/>
+                </a:solidFill>
+                <a:latin typeface="Inter"/>
+                <a:ea typeface="Inter"/>
+                <a:cs typeface="Inter"/>
+                <a:sym typeface="Inter"/>
+              </a:rPr>
+              <a:t>edgeProximity</a:t>
+            </a:r>
+            <a:r>
+              <a:rPr lang="en-US" sz="1350" dirty="0">
+                <a:solidFill>
+                  <a:srgbClr val="CBD5E1"/>
+                </a:solidFill>
+                <a:latin typeface="Inter"/>
+                <a:ea typeface="Inter"/>
+                <a:cs typeface="Inter"/>
+                <a:sym typeface="Inter"/>
+              </a:rPr>
+              <a:t>).</a:t>
+            </a:r>
+            <a:endParaRPr lang="en-US" sz="1200" dirty="0"/>
+          </a:p>
+        </p:txBody>
+      </p:sp>
+      <p:pic>
+        <p:nvPicPr>
+          <p:cNvPr id="7" name="Picture 6">
+            <a:extLst>
+              <a:ext uri="{FF2B5EF4-FFF2-40B4-BE49-F238E27FC236}">
+                <a16:creationId xmlns:a16="http://schemas.microsoft.com/office/drawing/2014/main" id="{51B733D1-2FD2-68CA-53C1-2D0404213B2E}"/>
+              </a:ext>
+            </a:extLst>
+          </p:cNvPr>
+          <p:cNvPicPr>
+            <a:picLocks/>
+          </p:cNvPicPr>
+          <p:nvPr/>
+        </p:nvPicPr>
+        <p:blipFill>
+          <a:blip r:embed="rId4"/>
+          <a:stretch>
+            <a:fillRect/>
+          </a:stretch>
+        </p:blipFill>
+        <p:spPr>
+          <a:xfrm>
+            <a:off x="581025" y="1786344"/>
+            <a:ext cx="3060000" cy="1800000"/>
+          </a:xfrm>
+          <a:prstGeom prst="roundRect">
+            <a:avLst/>
+          </a:prstGeom>
+        </p:spPr>
+      </p:pic>
+      <p:pic>
+        <p:nvPicPr>
+          <p:cNvPr id="9" name="Picture 8">
+            <a:extLst>
+              <a:ext uri="{FF2B5EF4-FFF2-40B4-BE49-F238E27FC236}">
+                <a16:creationId xmlns:a16="http://schemas.microsoft.com/office/drawing/2014/main" id="{7FDB217B-EAC7-3A76-6E33-93235D21A175}"/>
+              </a:ext>
+            </a:extLst>
+          </p:cNvPr>
+          <p:cNvPicPr>
+            <a:picLocks/>
+          </p:cNvPicPr>
+          <p:nvPr/>
+        </p:nvPicPr>
+        <p:blipFill>
+          <a:blip r:embed="rId5"/>
+          <a:stretch>
+            <a:fillRect/>
+          </a:stretch>
+        </p:blipFill>
+        <p:spPr>
+          <a:xfrm>
+            <a:off x="8092975" y="1786344"/>
+            <a:ext cx="3060000" cy="1800000"/>
+          </a:xfrm>
+          <a:prstGeom prst="roundRect">
+            <a:avLst/>
+          </a:prstGeom>
+        </p:spPr>
+      </p:pic>
+      <p:pic>
+        <p:nvPicPr>
+          <p:cNvPr id="11" name="Picture 10">
+            <a:extLst>
+              <a:ext uri="{FF2B5EF4-FFF2-40B4-BE49-F238E27FC236}">
+                <a16:creationId xmlns:a16="http://schemas.microsoft.com/office/drawing/2014/main" id="{1D897B90-87BC-E6D7-C566-D8C5E134C1B6}"/>
+              </a:ext>
+            </a:extLst>
+          </p:cNvPr>
+          <p:cNvPicPr>
+            <a:picLocks/>
+          </p:cNvPicPr>
+          <p:nvPr/>
+        </p:nvPicPr>
+        <p:blipFill>
+          <a:blip r:embed="rId6"/>
+          <a:stretch>
+            <a:fillRect/>
+          </a:stretch>
+        </p:blipFill>
+        <p:spPr>
+          <a:xfrm>
+            <a:off x="4337000" y="1786344"/>
+            <a:ext cx="3060000" cy="1800000"/>
+          </a:xfrm>
+          <a:prstGeom prst="roundRect">
+            <a:avLst/>
+          </a:prstGeom>
+        </p:spPr>
+      </p:pic>
+      <p:sp>
+        <p:nvSpPr>
+          <p:cNvPr id="12" name="Google Shape;109;p15">
+            <a:extLst>
+              <a:ext uri="{FF2B5EF4-FFF2-40B4-BE49-F238E27FC236}">
+                <a16:creationId xmlns:a16="http://schemas.microsoft.com/office/drawing/2014/main" id="{DDE438B9-27C5-7D87-6121-8C9121143AE0}"/>
+              </a:ext>
+            </a:extLst>
+          </p:cNvPr>
+          <p:cNvSpPr txBox="1"/>
+          <p:nvPr/>
+        </p:nvSpPr>
+        <p:spPr>
+          <a:xfrm>
+            <a:off x="11390654" y="581025"/>
+            <a:ext cx="143704" cy="430887"/>
+          </a:xfrm>
+          <a:prstGeom prst="rect">
+            <a:avLst/>
+          </a:prstGeom>
+          <a:noFill/>
+          <a:ln>
+            <a:noFill/>
+          </a:ln>
+        </p:spPr>
+        <p:txBody>
+          <a:bodyPr spcFirstLastPara="1" wrap="square" lIns="0" tIns="0" rIns="0" bIns="0" anchor="t" anchorCtr="0">
+            <a:spAutoFit/>
+          </a:bodyPr>
+          <a:lstStyle/>
+          <a:p>
+            <a:pPr marL="0" marR="0" lvl="0" indent="0" algn="l" rtl="0">
+              <a:lnSpc>
+                <a:spcPct val="139925"/>
+              </a:lnSpc>
+              <a:spcBef>
+                <a:spcPts val="0"/>
+              </a:spcBef>
+              <a:spcAft>
+                <a:spcPts val="0"/>
+              </a:spcAft>
+              <a:buNone/>
+            </a:pPr>
+            <a:r>
+              <a:rPr lang="en-US" sz="2000" dirty="0">
                 <a:solidFill>
                   <a:schemeClr val="bg1"/>
                 </a:solidFill>
@@ -21023,8 +23046,8 @@
         </p:nvSpPr>
         <p:spPr>
           <a:xfrm>
-            <a:off x="11390654" y="581025"/>
-            <a:ext cx="143704" cy="430887"/>
+            <a:off x="11420474" y="581025"/>
+            <a:ext cx="113883" cy="430887"/>
           </a:xfrm>
           <a:prstGeom prst="rect">
             <a:avLst/>
